--- a/vfile/inform_module/module_library.pptx
+++ b/vfile/inform_module/module_library.pptx
@@ -12,7 +12,7 @@
     <p:sldId id="260" r:id="rId6"/>
     <p:sldId id="262" r:id="rId7"/>
     <p:sldId id="263" r:id="rId8"/>
-    <p:sldId id="265" r:id="rId9"/>
+    <p:sldId id="292" r:id="rId9"/>
     <p:sldId id="264" r:id="rId10"/>
   </p:sldIdLst>
   <p:sldSz cx="12192000" cy="6858000"/>
@@ -267,7 +267,7 @@
           <a:p>
             <a:fld id="{EC59C312-7B2E-4DDA-A9F8-AF76B6BCE6B9}" type="datetimeFigureOut">
               <a:rPr lang="ko-KR" altLang="en-US" smtClean="0"/>
-              <a:t>2026-10-06</a:t>
+              <a:t>2026-10-07</a:t>
             </a:fld>
             <a:endParaRPr lang="ko-KR" altLang="en-US"/>
           </a:p>
@@ -465,7 +465,7 @@
           <a:p>
             <a:fld id="{EC59C312-7B2E-4DDA-A9F8-AF76B6BCE6B9}" type="datetimeFigureOut">
               <a:rPr lang="ko-KR" altLang="en-US" smtClean="0"/>
-              <a:t>2026-10-06</a:t>
+              <a:t>2026-10-07</a:t>
             </a:fld>
             <a:endParaRPr lang="ko-KR" altLang="en-US"/>
           </a:p>
@@ -673,7 +673,7 @@
           <a:p>
             <a:fld id="{EC59C312-7B2E-4DDA-A9F8-AF76B6BCE6B9}" type="datetimeFigureOut">
               <a:rPr lang="ko-KR" altLang="en-US" smtClean="0"/>
-              <a:t>2026-10-06</a:t>
+              <a:t>2026-10-07</a:t>
             </a:fld>
             <a:endParaRPr lang="ko-KR" altLang="en-US"/>
           </a:p>
@@ -871,7 +871,7 @@
           <a:p>
             <a:fld id="{EC59C312-7B2E-4DDA-A9F8-AF76B6BCE6B9}" type="datetimeFigureOut">
               <a:rPr lang="ko-KR" altLang="en-US" smtClean="0"/>
-              <a:t>2026-10-06</a:t>
+              <a:t>2026-10-07</a:t>
             </a:fld>
             <a:endParaRPr lang="ko-KR" altLang="en-US"/>
           </a:p>
@@ -1146,7 +1146,7 @@
           <a:p>
             <a:fld id="{EC59C312-7B2E-4DDA-A9F8-AF76B6BCE6B9}" type="datetimeFigureOut">
               <a:rPr lang="ko-KR" altLang="en-US" smtClean="0"/>
-              <a:t>2026-10-06</a:t>
+              <a:t>2026-10-07</a:t>
             </a:fld>
             <a:endParaRPr lang="ko-KR" altLang="en-US"/>
           </a:p>
@@ -1411,7 +1411,7 @@
           <a:p>
             <a:fld id="{EC59C312-7B2E-4DDA-A9F8-AF76B6BCE6B9}" type="datetimeFigureOut">
               <a:rPr lang="ko-KR" altLang="en-US" smtClean="0"/>
-              <a:t>2026-10-06</a:t>
+              <a:t>2026-10-07</a:t>
             </a:fld>
             <a:endParaRPr lang="ko-KR" altLang="en-US"/>
           </a:p>
@@ -1823,7 +1823,7 @@
           <a:p>
             <a:fld id="{EC59C312-7B2E-4DDA-A9F8-AF76B6BCE6B9}" type="datetimeFigureOut">
               <a:rPr lang="ko-KR" altLang="en-US" smtClean="0"/>
-              <a:t>2026-10-06</a:t>
+              <a:t>2026-10-07</a:t>
             </a:fld>
             <a:endParaRPr lang="ko-KR" altLang="en-US"/>
           </a:p>
@@ -1964,7 +1964,7 @@
           <a:p>
             <a:fld id="{EC59C312-7B2E-4DDA-A9F8-AF76B6BCE6B9}" type="datetimeFigureOut">
               <a:rPr lang="ko-KR" altLang="en-US" smtClean="0"/>
-              <a:t>2026-10-06</a:t>
+              <a:t>2026-10-07</a:t>
             </a:fld>
             <a:endParaRPr lang="ko-KR" altLang="en-US"/>
           </a:p>
@@ -2077,7 +2077,7 @@
           <a:p>
             <a:fld id="{EC59C312-7B2E-4DDA-A9F8-AF76B6BCE6B9}" type="datetimeFigureOut">
               <a:rPr lang="ko-KR" altLang="en-US" smtClean="0"/>
-              <a:t>2026-10-06</a:t>
+              <a:t>2026-10-07</a:t>
             </a:fld>
             <a:endParaRPr lang="ko-KR" altLang="en-US"/>
           </a:p>
@@ -2388,7 +2388,7 @@
           <a:p>
             <a:fld id="{EC59C312-7B2E-4DDA-A9F8-AF76B6BCE6B9}" type="datetimeFigureOut">
               <a:rPr lang="ko-KR" altLang="en-US" smtClean="0"/>
-              <a:t>2026-10-06</a:t>
+              <a:t>2026-10-07</a:t>
             </a:fld>
             <a:endParaRPr lang="ko-KR" altLang="en-US"/>
           </a:p>
@@ -2676,7 +2676,7 @@
           <a:p>
             <a:fld id="{EC59C312-7B2E-4DDA-A9F8-AF76B6BCE6B9}" type="datetimeFigureOut">
               <a:rPr lang="ko-KR" altLang="en-US" smtClean="0"/>
-              <a:t>2026-10-06</a:t>
+              <a:t>2026-10-07</a:t>
             </a:fld>
             <a:endParaRPr lang="ko-KR" altLang="en-US"/>
           </a:p>
@@ -2917,7 +2917,7 @@
           <a:p>
             <a:fld id="{EC59C312-7B2E-4DDA-A9F8-AF76B6BCE6B9}" type="datetimeFigureOut">
               <a:rPr lang="ko-KR" altLang="en-US" smtClean="0"/>
-              <a:t>2026-10-06</a:t>
+              <a:t>2026-10-07</a:t>
             </a:fld>
             <a:endParaRPr lang="ko-KR" altLang="en-US"/>
           </a:p>
@@ -33081,7 +33081,7 @@
                     </a:solidFill>
                     <a:latin typeface="Malgun Gothic" panose="020B0503020000020004" pitchFamily="50" charset="-127"/>
                   </a:rPr>
-                  <a:t>i_clk_100Hz</a:t>
+                  <a:t>i_clk_1kHz</a:t>
                 </a:r>
                 <a:endParaRPr lang="ko-KR" altLang="en-US" sz="800" b="1">
                   <a:solidFill>
@@ -33817,7 +33817,7 @@
                   </a:solidFill>
                   <a:latin typeface="Malgun Gothic" panose="020B0503020000020004" pitchFamily="50" charset="-127"/>
                 </a:rPr>
-                <a:t>o_clk_100Hz</a:t>
+                <a:t>o_clk_1kHz</a:t>
               </a:r>
               <a:endParaRPr lang="ko-KR" altLang="en-US" sz="800" b="1">
                 <a:solidFill>
@@ -33997,7 +33997,13 @@
   <p:cSld>
     <p:spTree>
       <p:nvGrpSpPr>
-        <p:cNvPr id="1" name=""/>
+        <p:cNvPr id="1" name="">
+          <a:extLst>
+            <a:ext uri="{FF2B5EF4-FFF2-40B4-BE49-F238E27FC236}">
+              <a16:creationId xmlns:a16="http://schemas.microsoft.com/office/drawing/2014/main" id="{C4B529A7-E971-0B96-571B-5907908DAE07}"/>
+            </a:ext>
+          </a:extLst>
+        </p:cNvPr>
         <p:cNvGrpSpPr/>
         <p:nvPr/>
       </p:nvGrpSpPr>
@@ -34011,65 +34017,4927 @@
       </p:grpSpPr>
       <p:sp>
         <p:nvSpPr>
-          <p:cNvPr id="2" name="제목 1">
+          <p:cNvPr id="53" name="top_frame">
             <a:extLst>
               <a:ext uri="{FF2B5EF4-FFF2-40B4-BE49-F238E27FC236}">
-                <a16:creationId xmlns:a16="http://schemas.microsoft.com/office/drawing/2014/main" id="{27F90272-A079-6802-F9B2-54E2C2E4F7C1}"/>
+                <a16:creationId xmlns:a16="http://schemas.microsoft.com/office/drawing/2014/main" id="{39ABE9D4-AB8D-B315-2CDD-76598F39C0FA}"/>
               </a:ext>
             </a:extLst>
           </p:cNvPr>
-          <p:cNvSpPr>
-            <a:spLocks noGrp="1"/>
-          </p:cNvSpPr>
-          <p:nvPr>
-            <p:ph type="ctrTitle"/>
-          </p:nvPr>
+          <p:cNvSpPr/>
+          <p:nvPr/>
         </p:nvSpPr>
-        <p:spPr/>
+        <p:spPr>
+          <a:xfrm>
+            <a:off x="4634424" y="1805588"/>
+            <a:ext cx="5209352" cy="3729957"/>
+          </a:xfrm>
+          <a:prstGeom prst="roundRect">
+            <a:avLst>
+              <a:gd name="adj" fmla="val 2000"/>
+            </a:avLst>
+          </a:prstGeom>
+          <a:solidFill>
+            <a:srgbClr val="92D050">
+              <a:alpha val="14000"/>
+            </a:srgbClr>
+          </a:solidFill>
+          <a:ln w="12700" cap="flat" cmpd="sng" algn="ctr">
+            <a:solidFill>
+              <a:srgbClr val="9CA3AF"/>
+            </a:solidFill>
+            <a:prstDash val="dash"/>
+            <a:miter lim="800000"/>
+          </a:ln>
+          <a:effectLst/>
+        </p:spPr>
+        <p:style>
+          <a:lnRef idx="2">
+            <a:schemeClr val="accent1">
+              <a:shade val="15000"/>
+            </a:schemeClr>
+          </a:lnRef>
+          <a:fillRef idx="1">
+            <a:schemeClr val="accent1"/>
+          </a:fillRef>
+          <a:effectRef idx="0">
+            <a:schemeClr val="accent1"/>
+          </a:effectRef>
+          <a:fontRef idx="minor">
+            <a:schemeClr val="lt1"/>
+          </a:fontRef>
+        </p:style>
         <p:txBody>
-          <a:bodyPr/>
+          <a:bodyPr rtlCol="0" anchor="ctr"/>
+          <a:lstStyle/>
+          <a:p>
+            <a:pPr algn="ctr"/>
+            <a:endParaRPr lang="ko-KR" altLang="en-US" sz="1600"/>
+          </a:p>
+        </p:txBody>
+      </p:sp>
+      <p:sp>
+        <p:nvSpPr>
+          <p:cNvPr id="2" name="TextBox 1">
+            <a:extLst>
+              <a:ext uri="{FF2B5EF4-FFF2-40B4-BE49-F238E27FC236}">
+                <a16:creationId xmlns:a16="http://schemas.microsoft.com/office/drawing/2014/main" id="{A4FC2A94-25A8-C907-2926-FAE11022A85A}"/>
+              </a:ext>
+            </a:extLst>
+          </p:cNvPr>
+          <p:cNvSpPr txBox="1"/>
+          <p:nvPr/>
+        </p:nvSpPr>
+        <p:spPr>
+          <a:xfrm>
+            <a:off x="561780" y="204197"/>
+            <a:ext cx="7620000" cy="276999"/>
+          </a:xfrm>
+          <a:prstGeom prst="rect">
+            <a:avLst/>
+          </a:prstGeom>
+          <a:noFill/>
+        </p:spPr>
+        <p:txBody>
+          <a:bodyPr vert="horz" wrap="square" lIns="0" tIns="0" rIns="0" bIns="0" rtlCol="0">
+            <a:noAutofit/>
+          </a:bodyPr>
           <a:lstStyle/>
           <a:p>
             <a:r>
-              <a:rPr lang="en-US" altLang="ko-KR"/>
-              <a:t>10/06</a:t>
+              <a:rPr lang="en-US" altLang="ko-KR" sz="1001" b="1">
+                <a:solidFill>
+                  <a:srgbClr val="3730A3"/>
+                </a:solidFill>
+                <a:latin typeface="Malgun Gothic" panose="020B0503020000020004" pitchFamily="50" charset="-127"/>
+              </a:rPr>
+              <a:t>EXAMPLE</a:t>
             </a:r>
+            <a:endParaRPr lang="ko-KR" altLang="en-US" sz="1001" b="1">
+              <a:solidFill>
+                <a:srgbClr val="3730A3"/>
+              </a:solidFill>
+              <a:latin typeface="Malgun Gothic" panose="020B0503020000020004" pitchFamily="50" charset="-127"/>
+            </a:endParaRPr>
+          </a:p>
+        </p:txBody>
+      </p:sp>
+      <p:sp>
+        <p:nvSpPr>
+          <p:cNvPr id="3" name="TextBox 2">
+            <a:extLst>
+              <a:ext uri="{FF2B5EF4-FFF2-40B4-BE49-F238E27FC236}">
+                <a16:creationId xmlns:a16="http://schemas.microsoft.com/office/drawing/2014/main" id="{F17FBE83-EE07-6A7A-D283-5DD36D26458A}"/>
+              </a:ext>
+            </a:extLst>
+          </p:cNvPr>
+          <p:cNvSpPr txBox="1"/>
+          <p:nvPr/>
+        </p:nvSpPr>
+        <p:spPr>
+          <a:xfrm>
+            <a:off x="525782" y="406401"/>
+            <a:ext cx="11430000" cy="276999"/>
+          </a:xfrm>
+          <a:prstGeom prst="rect">
+            <a:avLst/>
+          </a:prstGeom>
+          <a:noFill/>
+        </p:spPr>
+        <p:txBody>
+          <a:bodyPr vert="horz" wrap="square" lIns="0" tIns="0" rIns="0" bIns="0" rtlCol="0">
+            <a:noAutofit/>
+          </a:bodyPr>
+          <a:lstStyle/>
+          <a:p>
             <a:r>
-              <a:rPr lang="ko-KR" altLang="en-US"/>
-              <a:t>일 프로젝트</a:t>
+              <a:rPr lang="ko-KR" altLang="en-US" sz="2000" b="1">
+                <a:solidFill>
+                  <a:srgbClr val="1F2937"/>
+                </a:solidFill>
+                <a:latin typeface="Malgun Gothic" panose="020B0503020000020004" pitchFamily="50" charset="-127"/>
+              </a:rPr>
+              <a:t>프로젝트</a:t>
             </a:r>
           </a:p>
         </p:txBody>
       </p:sp>
       <p:sp>
         <p:nvSpPr>
-          <p:cNvPr id="3" name="부제목 2">
+          <p:cNvPr id="5" name="top_frame">
             <a:extLst>
               <a:ext uri="{FF2B5EF4-FFF2-40B4-BE49-F238E27FC236}">
-                <a16:creationId xmlns:a16="http://schemas.microsoft.com/office/drawing/2014/main" id="{6990F138-DCFF-7BC9-7505-BCB6DA9A0607}"/>
+                <a16:creationId xmlns:a16="http://schemas.microsoft.com/office/drawing/2014/main" id="{37250D58-0FD3-E613-7DF8-60FBCF43915E}"/>
               </a:ext>
             </a:extLst>
           </p:cNvPr>
-          <p:cNvSpPr>
-            <a:spLocks noGrp="1"/>
-          </p:cNvSpPr>
-          <p:nvPr>
-            <p:ph type="subTitle" idx="1"/>
-          </p:nvPr>
+          <p:cNvSpPr/>
+          <p:nvPr/>
         </p:nvSpPr>
-        <p:spPr/>
+        <p:spPr>
+          <a:xfrm>
+            <a:off x="1310640" y="885243"/>
+            <a:ext cx="8875597" cy="4867384"/>
+          </a:xfrm>
+          <a:prstGeom prst="roundRect">
+            <a:avLst>
+              <a:gd name="adj" fmla="val 2000"/>
+            </a:avLst>
+          </a:prstGeom>
+          <a:noFill/>
+          <a:ln w="12700" cap="flat" cmpd="sng" algn="ctr">
+            <a:solidFill>
+              <a:srgbClr val="9CA3AF"/>
+            </a:solidFill>
+            <a:prstDash val="dash"/>
+            <a:miter lim="800000"/>
+          </a:ln>
+          <a:effectLst/>
+          <a:extLst>
+            <a:ext uri="{909E8E84-426E-40DD-AFC4-6F175D3DCCD1}">
+              <a14:hiddenFill xmlns:a14="http://schemas.microsoft.com/office/drawing/2010/main">
+                <a:solidFill>
+                  <a:schemeClr val="accent1"/>
+                </a:solidFill>
+              </a14:hiddenFill>
+            </a:ext>
+          </a:extLst>
+        </p:spPr>
+        <p:style>
+          <a:lnRef idx="2">
+            <a:schemeClr val="accent1">
+              <a:shade val="15000"/>
+            </a:schemeClr>
+          </a:lnRef>
+          <a:fillRef idx="1">
+            <a:schemeClr val="accent1"/>
+          </a:fillRef>
+          <a:effectRef idx="0">
+            <a:schemeClr val="accent1"/>
+          </a:effectRef>
+          <a:fontRef idx="minor">
+            <a:schemeClr val="lt1"/>
+          </a:fontRef>
+        </p:style>
         <p:txBody>
-          <a:bodyPr/>
+          <a:bodyPr rtlCol="0" anchor="ctr"/>
           <a:lstStyle/>
           <a:p>
-            <a:endParaRPr lang="ko-KR" altLang="en-US"/>
+            <a:pPr algn="ctr"/>
+            <a:endParaRPr lang="ko-KR" altLang="en-US" sz="1600"/>
+          </a:p>
+        </p:txBody>
+      </p:sp>
+      <p:grpSp>
+        <p:nvGrpSpPr>
+          <p:cNvPr id="51" name="U_SPLIT">
+            <a:extLst>
+              <a:ext uri="{FF2B5EF4-FFF2-40B4-BE49-F238E27FC236}">
+                <a16:creationId xmlns:a16="http://schemas.microsoft.com/office/drawing/2014/main" id="{FAF134BC-DAFF-6A71-2CC8-7139C34C8878}"/>
+              </a:ext>
+            </a:extLst>
+          </p:cNvPr>
+          <p:cNvGrpSpPr/>
+          <p:nvPr/>
+        </p:nvGrpSpPr>
+        <p:grpSpPr>
+          <a:xfrm>
+            <a:off x="5359061" y="1930380"/>
+            <a:ext cx="1426394" cy="1132609"/>
+            <a:chOff x="6477000" y="2476500"/>
+            <a:chExt cx="1905000" cy="1524000"/>
+          </a:xfrm>
+        </p:grpSpPr>
+        <p:sp>
+          <p:nvSpPr>
+            <p:cNvPr id="40" name="U_SPLIT_body">
+              <a:extLst>
+                <a:ext uri="{FF2B5EF4-FFF2-40B4-BE49-F238E27FC236}">
+                  <a16:creationId xmlns:a16="http://schemas.microsoft.com/office/drawing/2014/main" id="{403F0620-5FD6-F6DC-98F1-5AEEC6F08F8D}"/>
+                </a:ext>
+              </a:extLst>
+            </p:cNvPr>
+            <p:cNvSpPr/>
+            <p:nvPr/>
+          </p:nvSpPr>
+          <p:spPr>
+            <a:xfrm>
+              <a:off x="6604000" y="2476500"/>
+              <a:ext cx="1651000" cy="1524000"/>
+            </a:xfrm>
+            <a:prstGeom prst="roundRect">
+              <a:avLst>
+                <a:gd name="adj" fmla="val 6000"/>
+              </a:avLst>
+            </a:prstGeom>
+            <a:solidFill>
+              <a:srgbClr val="ECFEFF"/>
+            </a:solidFill>
+            <a:ln w="19050">
+              <a:solidFill>
+                <a:srgbClr val="0E7490"/>
+              </a:solidFill>
+            </a:ln>
+          </p:spPr>
+          <p:style>
+            <a:lnRef idx="2">
+              <a:schemeClr val="accent1">
+                <a:shade val="15000"/>
+              </a:schemeClr>
+            </a:lnRef>
+            <a:fillRef idx="1">
+              <a:schemeClr val="accent1"/>
+            </a:fillRef>
+            <a:effectRef idx="0">
+              <a:schemeClr val="accent1"/>
+            </a:effectRef>
+            <a:fontRef idx="minor">
+              <a:schemeClr val="lt1"/>
+            </a:fontRef>
+          </p:style>
+          <p:txBody>
+            <a:bodyPr lIns="25401" tIns="38100" rIns="25401" rtlCol="0" anchor="t"/>
+            <a:lstStyle/>
+            <a:p>
+              <a:pPr algn="ctr"/>
+              <a:r>
+                <a:rPr lang="en-US" altLang="ko-KR" sz="900" b="1">
+                  <a:solidFill>
+                    <a:srgbClr val="0E7490"/>
+                  </a:solidFill>
+                  <a:latin typeface="Malgun Gothic" panose="020B0503020000020004" pitchFamily="50" charset="-127"/>
+                </a:rPr>
+                <a:t>digit_splitter</a:t>
+              </a:r>
+            </a:p>
+            <a:p>
+              <a:pPr algn="ctr"/>
+              <a:r>
+                <a:rPr lang="en-US" altLang="ko-KR" sz="600">
+                  <a:solidFill>
+                    <a:srgbClr val="6B7280"/>
+                  </a:solidFill>
+                  <a:latin typeface="Malgun Gothic" panose="020B0503020000020004" pitchFamily="50" charset="-127"/>
+                </a:rPr>
+                <a:t>U_SPLIT #(9)</a:t>
+              </a:r>
+              <a:endParaRPr lang="ko-KR" altLang="en-US" sz="600">
+                <a:solidFill>
+                  <a:srgbClr val="6B7280"/>
+                </a:solidFill>
+                <a:latin typeface="Malgun Gothic" panose="020B0503020000020004" pitchFamily="50" charset="-127"/>
+              </a:endParaRPr>
+            </a:p>
+          </p:txBody>
+        </p:sp>
+        <p:sp>
+          <p:nvSpPr>
+            <p:cNvPr id="41" name="U_SPLIT_pin_i_data[8:0]">
+              <a:extLst>
+                <a:ext uri="{FF2B5EF4-FFF2-40B4-BE49-F238E27FC236}">
+                  <a16:creationId xmlns:a16="http://schemas.microsoft.com/office/drawing/2014/main" id="{D1E587C8-706A-23F4-8ADE-B40E7E9648D5}"/>
+                </a:ext>
+              </a:extLst>
+            </p:cNvPr>
+            <p:cNvSpPr/>
+            <p:nvPr/>
+          </p:nvSpPr>
+          <p:spPr>
+            <a:xfrm>
+              <a:off x="6477000" y="2946400"/>
+              <a:ext cx="127000" cy="127000"/>
+            </a:xfrm>
+            <a:prstGeom prst="rect">
+              <a:avLst/>
+            </a:prstGeom>
+            <a:solidFill>
+              <a:srgbClr val="1D4ED8"/>
+            </a:solidFill>
+            <a:ln w="19050" cap="flat" cmpd="sng" algn="ctr">
+              <a:noFill/>
+              <a:prstDash val="solid"/>
+              <a:miter lim="800000"/>
+            </a:ln>
+            <a:effectLst/>
+          </p:spPr>
+          <p:style>
+            <a:lnRef idx="2">
+              <a:schemeClr val="accent1">
+                <a:shade val="15000"/>
+              </a:schemeClr>
+            </a:lnRef>
+            <a:fillRef idx="1">
+              <a:schemeClr val="accent1"/>
+            </a:fillRef>
+            <a:effectRef idx="0">
+              <a:schemeClr val="accent1"/>
+            </a:effectRef>
+            <a:fontRef idx="minor">
+              <a:schemeClr val="lt1"/>
+            </a:fontRef>
+          </p:style>
+          <p:txBody>
+            <a:bodyPr rtlCol="0" anchor="ctr"/>
+            <a:lstStyle/>
+            <a:p>
+              <a:pPr algn="ctr"/>
+              <a:endParaRPr lang="ko-KR" altLang="en-US" sz="1600"/>
+            </a:p>
+          </p:txBody>
+        </p:sp>
+        <p:sp>
+          <p:nvSpPr>
+            <p:cNvPr id="42" name="U_SPLIT_lbl_i_data[8:0]">
+              <a:extLst>
+                <a:ext uri="{FF2B5EF4-FFF2-40B4-BE49-F238E27FC236}">
+                  <a16:creationId xmlns:a16="http://schemas.microsoft.com/office/drawing/2014/main" id="{FF58EA5A-AAF5-88BA-A5CF-5C2BB3DBE40F}"/>
+                </a:ext>
+              </a:extLst>
+            </p:cNvPr>
+            <p:cNvSpPr txBox="1"/>
+            <p:nvPr/>
+          </p:nvSpPr>
+          <p:spPr>
+            <a:xfrm>
+              <a:off x="6654800" y="2921000"/>
+              <a:ext cx="952500" cy="276999"/>
+            </a:xfrm>
+            <a:prstGeom prst="rect">
+              <a:avLst/>
+            </a:prstGeom>
+            <a:noFill/>
+          </p:spPr>
+          <p:txBody>
+            <a:bodyPr vert="horz" wrap="square" lIns="0" tIns="0" rIns="0" bIns="0" rtlCol="0">
+              <a:noAutofit/>
+            </a:bodyPr>
+            <a:lstStyle/>
+            <a:p>
+              <a:r>
+                <a:rPr lang="en-US" altLang="ko-KR" sz="600" b="1">
+                  <a:solidFill>
+                    <a:srgbClr val="1F2937"/>
+                  </a:solidFill>
+                  <a:latin typeface="Malgun Gothic" panose="020B0503020000020004" pitchFamily="50" charset="-127"/>
+                </a:rPr>
+                <a:t>i_data[13:0]</a:t>
+              </a:r>
+              <a:endParaRPr lang="ko-KR" altLang="en-US" sz="600" b="1">
+                <a:solidFill>
+                  <a:srgbClr val="1F2937"/>
+                </a:solidFill>
+                <a:latin typeface="Malgun Gothic" panose="020B0503020000020004" pitchFamily="50" charset="-127"/>
+              </a:endParaRPr>
+            </a:p>
+          </p:txBody>
+        </p:sp>
+        <p:sp>
+          <p:nvSpPr>
+            <p:cNvPr id="43" name="U_SPLIT_pin_o_digit_1[3:0]">
+              <a:extLst>
+                <a:ext uri="{FF2B5EF4-FFF2-40B4-BE49-F238E27FC236}">
+                  <a16:creationId xmlns:a16="http://schemas.microsoft.com/office/drawing/2014/main" id="{A2148DFE-8F22-ACC2-BB2C-F0D832D15235}"/>
+                </a:ext>
+              </a:extLst>
+            </p:cNvPr>
+            <p:cNvSpPr/>
+            <p:nvPr/>
+          </p:nvSpPr>
+          <p:spPr>
+            <a:xfrm>
+              <a:off x="8255000" y="2946400"/>
+              <a:ext cx="127000" cy="127000"/>
+            </a:xfrm>
+            <a:prstGeom prst="rect">
+              <a:avLst/>
+            </a:prstGeom>
+            <a:solidFill>
+              <a:srgbClr val="15803D"/>
+            </a:solidFill>
+            <a:ln w="19050" cap="flat" cmpd="sng" algn="ctr">
+              <a:noFill/>
+              <a:prstDash val="solid"/>
+              <a:miter lim="800000"/>
+            </a:ln>
+            <a:effectLst/>
+          </p:spPr>
+          <p:style>
+            <a:lnRef idx="2">
+              <a:schemeClr val="accent1">
+                <a:shade val="15000"/>
+              </a:schemeClr>
+            </a:lnRef>
+            <a:fillRef idx="1">
+              <a:schemeClr val="accent1"/>
+            </a:fillRef>
+            <a:effectRef idx="0">
+              <a:schemeClr val="accent1"/>
+            </a:effectRef>
+            <a:fontRef idx="minor">
+              <a:schemeClr val="lt1"/>
+            </a:fontRef>
+          </p:style>
+          <p:txBody>
+            <a:bodyPr rtlCol="0" anchor="ctr"/>
+            <a:lstStyle/>
+            <a:p>
+              <a:pPr algn="ctr"/>
+              <a:endParaRPr lang="ko-KR" altLang="en-US" sz="1600"/>
+            </a:p>
+          </p:txBody>
+        </p:sp>
+        <p:sp>
+          <p:nvSpPr>
+            <p:cNvPr id="44" name="U_SPLIT_lbl_o_digit_1[3:0]">
+              <a:extLst>
+                <a:ext uri="{FF2B5EF4-FFF2-40B4-BE49-F238E27FC236}">
+                  <a16:creationId xmlns:a16="http://schemas.microsoft.com/office/drawing/2014/main" id="{EF7B94FC-AE8D-FD63-D44E-F32256B25068}"/>
+                </a:ext>
+              </a:extLst>
+            </p:cNvPr>
+            <p:cNvSpPr txBox="1"/>
+            <p:nvPr/>
+          </p:nvSpPr>
+          <p:spPr>
+            <a:xfrm>
+              <a:off x="7251700" y="2921000"/>
+              <a:ext cx="952500" cy="276999"/>
+            </a:xfrm>
+            <a:prstGeom prst="rect">
+              <a:avLst/>
+            </a:prstGeom>
+            <a:noFill/>
+          </p:spPr>
+          <p:txBody>
+            <a:bodyPr vert="horz" wrap="square" lIns="0" tIns="0" rIns="0" bIns="0" rtlCol="0">
+              <a:noAutofit/>
+            </a:bodyPr>
+            <a:lstStyle/>
+            <a:p>
+              <a:pPr algn="r"/>
+              <a:r>
+                <a:rPr lang="en-US" altLang="ko-KR" sz="600" b="1">
+                  <a:solidFill>
+                    <a:srgbClr val="1F2937"/>
+                  </a:solidFill>
+                  <a:latin typeface="Malgun Gothic" panose="020B0503020000020004" pitchFamily="50" charset="-127"/>
+                </a:rPr>
+                <a:t>o_digit_1[3:0]</a:t>
+              </a:r>
+              <a:endParaRPr lang="ko-KR" altLang="en-US" sz="600" b="1">
+                <a:solidFill>
+                  <a:srgbClr val="1F2937"/>
+                </a:solidFill>
+                <a:latin typeface="Malgun Gothic" panose="020B0503020000020004" pitchFamily="50" charset="-127"/>
+              </a:endParaRPr>
+            </a:p>
+          </p:txBody>
+        </p:sp>
+        <p:sp>
+          <p:nvSpPr>
+            <p:cNvPr id="45" name="U_SPLIT_pin_o_digit_10[3:0]">
+              <a:extLst>
+                <a:ext uri="{FF2B5EF4-FFF2-40B4-BE49-F238E27FC236}">
+                  <a16:creationId xmlns:a16="http://schemas.microsoft.com/office/drawing/2014/main" id="{5E763FFF-BDC7-1ABB-D306-6AE2EBBDE2BC}"/>
+                </a:ext>
+              </a:extLst>
+            </p:cNvPr>
+            <p:cNvSpPr/>
+            <p:nvPr/>
+          </p:nvSpPr>
+          <p:spPr>
+            <a:xfrm>
+              <a:off x="8255000" y="3200400"/>
+              <a:ext cx="127000" cy="127000"/>
+            </a:xfrm>
+            <a:prstGeom prst="rect">
+              <a:avLst/>
+            </a:prstGeom>
+            <a:solidFill>
+              <a:srgbClr val="15803D"/>
+            </a:solidFill>
+            <a:ln w="19050" cap="flat" cmpd="sng" algn="ctr">
+              <a:noFill/>
+              <a:prstDash val="solid"/>
+              <a:miter lim="800000"/>
+            </a:ln>
+            <a:effectLst/>
+          </p:spPr>
+          <p:style>
+            <a:lnRef idx="2">
+              <a:schemeClr val="accent1">
+                <a:shade val="15000"/>
+              </a:schemeClr>
+            </a:lnRef>
+            <a:fillRef idx="1">
+              <a:schemeClr val="accent1"/>
+            </a:fillRef>
+            <a:effectRef idx="0">
+              <a:schemeClr val="accent1"/>
+            </a:effectRef>
+            <a:fontRef idx="minor">
+              <a:schemeClr val="lt1"/>
+            </a:fontRef>
+          </p:style>
+          <p:txBody>
+            <a:bodyPr rtlCol="0" anchor="ctr"/>
+            <a:lstStyle/>
+            <a:p>
+              <a:pPr algn="ctr"/>
+              <a:endParaRPr lang="ko-KR" altLang="en-US" sz="1600"/>
+            </a:p>
+          </p:txBody>
+        </p:sp>
+        <p:sp>
+          <p:nvSpPr>
+            <p:cNvPr id="46" name="U_SPLIT_lbl_o_digit_10[3:0]">
+              <a:extLst>
+                <a:ext uri="{FF2B5EF4-FFF2-40B4-BE49-F238E27FC236}">
+                  <a16:creationId xmlns:a16="http://schemas.microsoft.com/office/drawing/2014/main" id="{F4751D55-B06A-24EE-77AF-BFFC55AFAAE6}"/>
+                </a:ext>
+              </a:extLst>
+            </p:cNvPr>
+            <p:cNvSpPr txBox="1"/>
+            <p:nvPr/>
+          </p:nvSpPr>
+          <p:spPr>
+            <a:xfrm>
+              <a:off x="7251700" y="3175000"/>
+              <a:ext cx="952500" cy="276999"/>
+            </a:xfrm>
+            <a:prstGeom prst="rect">
+              <a:avLst/>
+            </a:prstGeom>
+            <a:noFill/>
+          </p:spPr>
+          <p:txBody>
+            <a:bodyPr vert="horz" wrap="square" lIns="0" tIns="0" rIns="0" bIns="0" rtlCol="0">
+              <a:noAutofit/>
+            </a:bodyPr>
+            <a:lstStyle/>
+            <a:p>
+              <a:pPr algn="r"/>
+              <a:r>
+                <a:rPr lang="en-US" altLang="ko-KR" sz="600" b="1">
+                  <a:solidFill>
+                    <a:srgbClr val="1F2937"/>
+                  </a:solidFill>
+                  <a:latin typeface="Malgun Gothic" panose="020B0503020000020004" pitchFamily="50" charset="-127"/>
+                </a:rPr>
+                <a:t>o_digit_10[3:0]</a:t>
+              </a:r>
+              <a:endParaRPr lang="ko-KR" altLang="en-US" sz="600" b="1">
+                <a:solidFill>
+                  <a:srgbClr val="1F2937"/>
+                </a:solidFill>
+                <a:latin typeface="Malgun Gothic" panose="020B0503020000020004" pitchFamily="50" charset="-127"/>
+              </a:endParaRPr>
+            </a:p>
+          </p:txBody>
+        </p:sp>
+        <p:sp>
+          <p:nvSpPr>
+            <p:cNvPr id="47" name="U_SPLIT_pin_o_digit_100[3:0]">
+              <a:extLst>
+                <a:ext uri="{FF2B5EF4-FFF2-40B4-BE49-F238E27FC236}">
+                  <a16:creationId xmlns:a16="http://schemas.microsoft.com/office/drawing/2014/main" id="{3DCA3024-BA02-478B-E0FC-4D47DF2EB3F0}"/>
+                </a:ext>
+              </a:extLst>
+            </p:cNvPr>
+            <p:cNvSpPr/>
+            <p:nvPr/>
+          </p:nvSpPr>
+          <p:spPr>
+            <a:xfrm>
+              <a:off x="8255000" y="3454400"/>
+              <a:ext cx="127000" cy="127000"/>
+            </a:xfrm>
+            <a:prstGeom prst="rect">
+              <a:avLst/>
+            </a:prstGeom>
+            <a:solidFill>
+              <a:srgbClr val="15803D"/>
+            </a:solidFill>
+            <a:ln w="19050" cap="flat" cmpd="sng" algn="ctr">
+              <a:noFill/>
+              <a:prstDash val="solid"/>
+              <a:miter lim="800000"/>
+            </a:ln>
+            <a:effectLst/>
+          </p:spPr>
+          <p:style>
+            <a:lnRef idx="2">
+              <a:schemeClr val="accent1">
+                <a:shade val="15000"/>
+              </a:schemeClr>
+            </a:lnRef>
+            <a:fillRef idx="1">
+              <a:schemeClr val="accent1"/>
+            </a:fillRef>
+            <a:effectRef idx="0">
+              <a:schemeClr val="accent1"/>
+            </a:effectRef>
+            <a:fontRef idx="minor">
+              <a:schemeClr val="lt1"/>
+            </a:fontRef>
+          </p:style>
+          <p:txBody>
+            <a:bodyPr rtlCol="0" anchor="ctr"/>
+            <a:lstStyle/>
+            <a:p>
+              <a:pPr algn="ctr"/>
+              <a:endParaRPr lang="ko-KR" altLang="en-US" sz="1600"/>
+            </a:p>
+          </p:txBody>
+        </p:sp>
+        <p:sp>
+          <p:nvSpPr>
+            <p:cNvPr id="48" name="U_SPLIT_lbl_o_digit_100[3:0]">
+              <a:extLst>
+                <a:ext uri="{FF2B5EF4-FFF2-40B4-BE49-F238E27FC236}">
+                  <a16:creationId xmlns:a16="http://schemas.microsoft.com/office/drawing/2014/main" id="{D2D3FB96-5969-E274-45AA-0A2B2667EDDD}"/>
+                </a:ext>
+              </a:extLst>
+            </p:cNvPr>
+            <p:cNvSpPr txBox="1"/>
+            <p:nvPr/>
+          </p:nvSpPr>
+          <p:spPr>
+            <a:xfrm>
+              <a:off x="7251700" y="3429000"/>
+              <a:ext cx="952500" cy="276999"/>
+            </a:xfrm>
+            <a:prstGeom prst="rect">
+              <a:avLst/>
+            </a:prstGeom>
+            <a:noFill/>
+          </p:spPr>
+          <p:txBody>
+            <a:bodyPr vert="horz" wrap="square" lIns="0" tIns="0" rIns="0" bIns="0" rtlCol="0">
+              <a:noAutofit/>
+            </a:bodyPr>
+            <a:lstStyle/>
+            <a:p>
+              <a:pPr algn="r"/>
+              <a:r>
+                <a:rPr lang="en-US" altLang="ko-KR" sz="600" b="1">
+                  <a:solidFill>
+                    <a:srgbClr val="1F2937"/>
+                  </a:solidFill>
+                  <a:latin typeface="Malgun Gothic" panose="020B0503020000020004" pitchFamily="50" charset="-127"/>
+                </a:rPr>
+                <a:t>o_digit_100[3:0]</a:t>
+              </a:r>
+              <a:endParaRPr lang="ko-KR" altLang="en-US" sz="600" b="1">
+                <a:solidFill>
+                  <a:srgbClr val="1F2937"/>
+                </a:solidFill>
+                <a:latin typeface="Malgun Gothic" panose="020B0503020000020004" pitchFamily="50" charset="-127"/>
+              </a:endParaRPr>
+            </a:p>
+          </p:txBody>
+        </p:sp>
+        <p:sp>
+          <p:nvSpPr>
+            <p:cNvPr id="49" name="U_SPLIT_pin_o_digit_1000[3:0]">
+              <a:extLst>
+                <a:ext uri="{FF2B5EF4-FFF2-40B4-BE49-F238E27FC236}">
+                  <a16:creationId xmlns:a16="http://schemas.microsoft.com/office/drawing/2014/main" id="{C5AA0AB5-8E87-DD35-5B6C-0CCF1D0E37EF}"/>
+                </a:ext>
+              </a:extLst>
+            </p:cNvPr>
+            <p:cNvSpPr/>
+            <p:nvPr/>
+          </p:nvSpPr>
+          <p:spPr>
+            <a:xfrm>
+              <a:off x="8255000" y="3708400"/>
+              <a:ext cx="127000" cy="127000"/>
+            </a:xfrm>
+            <a:prstGeom prst="rect">
+              <a:avLst/>
+            </a:prstGeom>
+            <a:solidFill>
+              <a:srgbClr val="15803D"/>
+            </a:solidFill>
+            <a:ln w="19050" cap="flat" cmpd="sng" algn="ctr">
+              <a:noFill/>
+              <a:prstDash val="solid"/>
+              <a:miter lim="800000"/>
+            </a:ln>
+            <a:effectLst/>
+          </p:spPr>
+          <p:style>
+            <a:lnRef idx="2">
+              <a:schemeClr val="accent1">
+                <a:shade val="15000"/>
+              </a:schemeClr>
+            </a:lnRef>
+            <a:fillRef idx="1">
+              <a:schemeClr val="accent1"/>
+            </a:fillRef>
+            <a:effectRef idx="0">
+              <a:schemeClr val="accent1"/>
+            </a:effectRef>
+            <a:fontRef idx="minor">
+              <a:schemeClr val="lt1"/>
+            </a:fontRef>
+          </p:style>
+          <p:txBody>
+            <a:bodyPr rtlCol="0" anchor="ctr"/>
+            <a:lstStyle/>
+            <a:p>
+              <a:pPr algn="ctr"/>
+              <a:endParaRPr lang="ko-KR" altLang="en-US" sz="1600"/>
+            </a:p>
+          </p:txBody>
+        </p:sp>
+        <p:sp>
+          <p:nvSpPr>
+            <p:cNvPr id="50" name="U_SPLIT_lbl_o_digit_1000[3:0]">
+              <a:extLst>
+                <a:ext uri="{FF2B5EF4-FFF2-40B4-BE49-F238E27FC236}">
+                  <a16:creationId xmlns:a16="http://schemas.microsoft.com/office/drawing/2014/main" id="{C88B7BB0-7216-B3F7-1108-DDEDFBD06487}"/>
+                </a:ext>
+              </a:extLst>
+            </p:cNvPr>
+            <p:cNvSpPr txBox="1"/>
+            <p:nvPr/>
+          </p:nvSpPr>
+          <p:spPr>
+            <a:xfrm>
+              <a:off x="7251700" y="3683000"/>
+              <a:ext cx="952500" cy="276999"/>
+            </a:xfrm>
+            <a:prstGeom prst="rect">
+              <a:avLst/>
+            </a:prstGeom>
+            <a:noFill/>
+          </p:spPr>
+          <p:txBody>
+            <a:bodyPr vert="horz" wrap="square" lIns="0" tIns="0" rIns="0" bIns="0" rtlCol="0">
+              <a:noAutofit/>
+            </a:bodyPr>
+            <a:lstStyle/>
+            <a:p>
+              <a:pPr algn="r"/>
+              <a:r>
+                <a:rPr lang="en-US" altLang="ko-KR" sz="600" b="1">
+                  <a:solidFill>
+                    <a:srgbClr val="1F2937"/>
+                  </a:solidFill>
+                  <a:latin typeface="Malgun Gothic" panose="020B0503020000020004" pitchFamily="50" charset="-127"/>
+                </a:rPr>
+                <a:t>o_digit_1000[3:0]</a:t>
+              </a:r>
+              <a:endParaRPr lang="ko-KR" altLang="en-US" sz="600" b="1">
+                <a:solidFill>
+                  <a:srgbClr val="1F2937"/>
+                </a:solidFill>
+                <a:latin typeface="Malgun Gothic" panose="020B0503020000020004" pitchFamily="50" charset="-127"/>
+              </a:endParaRPr>
+            </a:p>
+          </p:txBody>
+        </p:sp>
+      </p:grpSp>
+      <p:grpSp>
+        <p:nvGrpSpPr>
+          <p:cNvPr id="77" name="U_FND">
+            <a:extLst>
+              <a:ext uri="{FF2B5EF4-FFF2-40B4-BE49-F238E27FC236}">
+                <a16:creationId xmlns:a16="http://schemas.microsoft.com/office/drawing/2014/main" id="{7BC541EA-4589-F45A-75FF-693C3A0D5664}"/>
+              </a:ext>
+            </a:extLst>
+          </p:cNvPr>
+          <p:cNvGrpSpPr/>
+          <p:nvPr/>
+        </p:nvGrpSpPr>
+        <p:grpSpPr>
+          <a:xfrm>
+            <a:off x="7728821" y="4844859"/>
+            <a:ext cx="1331300" cy="566305"/>
+            <a:chOff x="6985000" y="5461000"/>
+            <a:chExt cx="1778000" cy="762000"/>
+          </a:xfrm>
+        </p:grpSpPr>
+        <p:sp>
+          <p:nvSpPr>
+            <p:cNvPr id="72" name="U_FND_body">
+              <a:extLst>
+                <a:ext uri="{FF2B5EF4-FFF2-40B4-BE49-F238E27FC236}">
+                  <a16:creationId xmlns:a16="http://schemas.microsoft.com/office/drawing/2014/main" id="{67367F7D-F1B7-2CF0-6044-158B7336DF5C}"/>
+                </a:ext>
+              </a:extLst>
+            </p:cNvPr>
+            <p:cNvSpPr/>
+            <p:nvPr/>
+          </p:nvSpPr>
+          <p:spPr>
+            <a:xfrm>
+              <a:off x="7112000" y="5461000"/>
+              <a:ext cx="1524000" cy="762000"/>
+            </a:xfrm>
+            <a:prstGeom prst="roundRect">
+              <a:avLst>
+                <a:gd name="adj" fmla="val 6000"/>
+              </a:avLst>
+            </a:prstGeom>
+            <a:solidFill>
+              <a:srgbClr val="FEF2F2"/>
+            </a:solidFill>
+            <a:ln w="19050">
+              <a:solidFill>
+                <a:srgbClr val="B91C1C"/>
+              </a:solidFill>
+            </a:ln>
+          </p:spPr>
+          <p:style>
+            <a:lnRef idx="2">
+              <a:schemeClr val="accent1">
+                <a:shade val="15000"/>
+              </a:schemeClr>
+            </a:lnRef>
+            <a:fillRef idx="1">
+              <a:schemeClr val="accent1"/>
+            </a:fillRef>
+            <a:effectRef idx="0">
+              <a:schemeClr val="accent1"/>
+            </a:effectRef>
+            <a:fontRef idx="minor">
+              <a:schemeClr val="lt1"/>
+            </a:fontRef>
+          </p:style>
+          <p:txBody>
+            <a:bodyPr lIns="25401" tIns="38100" rIns="25401" rtlCol="0" anchor="t"/>
+            <a:lstStyle/>
+            <a:p>
+              <a:pPr algn="ctr"/>
+              <a:r>
+                <a:rPr lang="de-DE" altLang="ko-KR" sz="900" b="1">
+                  <a:solidFill>
+                    <a:srgbClr val="B91C1C"/>
+                  </a:solidFill>
+                  <a:latin typeface="Malgun Gothic" panose="020B0503020000020004" pitchFamily="50" charset="-127"/>
+                </a:rPr>
+                <a:t>fnd_decoder</a:t>
+              </a:r>
+            </a:p>
+            <a:p>
+              <a:pPr algn="ctr"/>
+              <a:r>
+                <a:rPr lang="de-DE" altLang="ko-KR" sz="600">
+                  <a:solidFill>
+                    <a:srgbClr val="6B7280"/>
+                  </a:solidFill>
+                  <a:latin typeface="Malgun Gothic" panose="020B0503020000020004" pitchFamily="50" charset="-127"/>
+                </a:rPr>
+                <a:t>U_FND_DEC</a:t>
+              </a:r>
+              <a:endParaRPr lang="ko-KR" altLang="en-US" sz="600">
+                <a:solidFill>
+                  <a:srgbClr val="6B7280"/>
+                </a:solidFill>
+                <a:latin typeface="Malgun Gothic" panose="020B0503020000020004" pitchFamily="50" charset="-127"/>
+              </a:endParaRPr>
+            </a:p>
+          </p:txBody>
+        </p:sp>
+        <p:sp>
+          <p:nvSpPr>
+            <p:cNvPr id="73" name="U_FND_pin_i_hex[3:0]">
+              <a:extLst>
+                <a:ext uri="{FF2B5EF4-FFF2-40B4-BE49-F238E27FC236}">
+                  <a16:creationId xmlns:a16="http://schemas.microsoft.com/office/drawing/2014/main" id="{42452281-AFEF-A4A0-EE26-6B75DB7F4CB2}"/>
+                </a:ext>
+              </a:extLst>
+            </p:cNvPr>
+            <p:cNvSpPr/>
+            <p:nvPr/>
+          </p:nvSpPr>
+          <p:spPr>
+            <a:xfrm>
+              <a:off x="6985000" y="5930900"/>
+              <a:ext cx="127000" cy="127000"/>
+            </a:xfrm>
+            <a:prstGeom prst="rect">
+              <a:avLst/>
+            </a:prstGeom>
+            <a:solidFill>
+              <a:srgbClr val="1D4ED8"/>
+            </a:solidFill>
+            <a:ln w="19050" cap="flat" cmpd="sng" algn="ctr">
+              <a:noFill/>
+              <a:prstDash val="solid"/>
+              <a:miter lim="800000"/>
+            </a:ln>
+            <a:effectLst/>
+          </p:spPr>
+          <p:style>
+            <a:lnRef idx="2">
+              <a:schemeClr val="accent1">
+                <a:shade val="15000"/>
+              </a:schemeClr>
+            </a:lnRef>
+            <a:fillRef idx="1">
+              <a:schemeClr val="accent1"/>
+            </a:fillRef>
+            <a:effectRef idx="0">
+              <a:schemeClr val="accent1"/>
+            </a:effectRef>
+            <a:fontRef idx="minor">
+              <a:schemeClr val="lt1"/>
+            </a:fontRef>
+          </p:style>
+          <p:txBody>
+            <a:bodyPr rtlCol="0" anchor="ctr"/>
+            <a:lstStyle/>
+            <a:p>
+              <a:pPr algn="ctr"/>
+              <a:endParaRPr lang="ko-KR" altLang="en-US" sz="1600"/>
+            </a:p>
+          </p:txBody>
+        </p:sp>
+        <p:sp>
+          <p:nvSpPr>
+            <p:cNvPr id="74" name="U_FND_lbl_i_hex[3:0]">
+              <a:extLst>
+                <a:ext uri="{FF2B5EF4-FFF2-40B4-BE49-F238E27FC236}">
+                  <a16:creationId xmlns:a16="http://schemas.microsoft.com/office/drawing/2014/main" id="{C1E977E1-15D0-3E90-99BC-573BE5621B82}"/>
+                </a:ext>
+              </a:extLst>
+            </p:cNvPr>
+            <p:cNvSpPr txBox="1"/>
+            <p:nvPr/>
+          </p:nvSpPr>
+          <p:spPr>
+            <a:xfrm>
+              <a:off x="7162800" y="5905500"/>
+              <a:ext cx="889000" cy="276999"/>
+            </a:xfrm>
+            <a:prstGeom prst="rect">
+              <a:avLst/>
+            </a:prstGeom>
+            <a:noFill/>
+          </p:spPr>
+          <p:txBody>
+            <a:bodyPr vert="horz" wrap="square" lIns="0" tIns="0" rIns="0" bIns="0" rtlCol="0">
+              <a:noAutofit/>
+            </a:bodyPr>
+            <a:lstStyle/>
+            <a:p>
+              <a:r>
+                <a:rPr lang="en-US" altLang="ko-KR" sz="600" b="1">
+                  <a:solidFill>
+                    <a:srgbClr val="1F2937"/>
+                  </a:solidFill>
+                  <a:latin typeface="Malgun Gothic" panose="020B0503020000020004" pitchFamily="50" charset="-127"/>
+                </a:rPr>
+                <a:t>i_hex[3:0]</a:t>
+              </a:r>
+              <a:endParaRPr lang="ko-KR" altLang="en-US" sz="600" b="1">
+                <a:solidFill>
+                  <a:srgbClr val="1F2937"/>
+                </a:solidFill>
+                <a:latin typeface="Malgun Gothic" panose="020B0503020000020004" pitchFamily="50" charset="-127"/>
+              </a:endParaRPr>
+            </a:p>
+          </p:txBody>
+        </p:sp>
+        <p:sp>
+          <p:nvSpPr>
+            <p:cNvPr id="75" name="U_FND_pin_o_fnd_data[7:0]">
+              <a:extLst>
+                <a:ext uri="{FF2B5EF4-FFF2-40B4-BE49-F238E27FC236}">
+                  <a16:creationId xmlns:a16="http://schemas.microsoft.com/office/drawing/2014/main" id="{D3B5C3EC-933A-1812-2482-D8EF010A8C29}"/>
+                </a:ext>
+              </a:extLst>
+            </p:cNvPr>
+            <p:cNvSpPr/>
+            <p:nvPr/>
+          </p:nvSpPr>
+          <p:spPr>
+            <a:xfrm>
+              <a:off x="8636000" y="5930900"/>
+              <a:ext cx="127000" cy="127000"/>
+            </a:xfrm>
+            <a:prstGeom prst="rect">
+              <a:avLst/>
+            </a:prstGeom>
+            <a:solidFill>
+              <a:srgbClr val="15803D"/>
+            </a:solidFill>
+            <a:ln w="19050" cap="flat" cmpd="sng" algn="ctr">
+              <a:noFill/>
+              <a:prstDash val="solid"/>
+              <a:miter lim="800000"/>
+            </a:ln>
+            <a:effectLst/>
+          </p:spPr>
+          <p:style>
+            <a:lnRef idx="2">
+              <a:schemeClr val="accent1">
+                <a:shade val="15000"/>
+              </a:schemeClr>
+            </a:lnRef>
+            <a:fillRef idx="1">
+              <a:schemeClr val="accent1"/>
+            </a:fillRef>
+            <a:effectRef idx="0">
+              <a:schemeClr val="accent1"/>
+            </a:effectRef>
+            <a:fontRef idx="minor">
+              <a:schemeClr val="lt1"/>
+            </a:fontRef>
+          </p:style>
+          <p:txBody>
+            <a:bodyPr rtlCol="0" anchor="ctr"/>
+            <a:lstStyle/>
+            <a:p>
+              <a:pPr algn="ctr"/>
+              <a:endParaRPr lang="ko-KR" altLang="en-US" sz="1600"/>
+            </a:p>
+          </p:txBody>
+        </p:sp>
+        <p:sp>
+          <p:nvSpPr>
+            <p:cNvPr id="76" name="U_FND_lbl_o_fnd_data[7:0]">
+              <a:extLst>
+                <a:ext uri="{FF2B5EF4-FFF2-40B4-BE49-F238E27FC236}">
+                  <a16:creationId xmlns:a16="http://schemas.microsoft.com/office/drawing/2014/main" id="{66313183-0A47-7665-5F4D-F8076F18A452}"/>
+                </a:ext>
+              </a:extLst>
+            </p:cNvPr>
+            <p:cNvSpPr txBox="1"/>
+            <p:nvPr/>
+          </p:nvSpPr>
+          <p:spPr>
+            <a:xfrm>
+              <a:off x="7696200" y="5905500"/>
+              <a:ext cx="889000" cy="276999"/>
+            </a:xfrm>
+            <a:prstGeom prst="rect">
+              <a:avLst/>
+            </a:prstGeom>
+            <a:noFill/>
+          </p:spPr>
+          <p:txBody>
+            <a:bodyPr vert="horz" wrap="square" lIns="0" tIns="0" rIns="0" bIns="0" rtlCol="0">
+              <a:noAutofit/>
+            </a:bodyPr>
+            <a:lstStyle/>
+            <a:p>
+              <a:pPr algn="r"/>
+              <a:r>
+                <a:rPr lang="en-US" altLang="ko-KR" sz="600" b="1">
+                  <a:solidFill>
+                    <a:srgbClr val="1F2937"/>
+                  </a:solidFill>
+                  <a:latin typeface="Malgun Gothic" panose="020B0503020000020004" pitchFamily="50" charset="-127"/>
+                </a:rPr>
+                <a:t>o_fnd_data[7:0]</a:t>
+              </a:r>
+              <a:endParaRPr lang="ko-KR" altLang="en-US" sz="600" b="1">
+                <a:solidFill>
+                  <a:srgbClr val="1F2937"/>
+                </a:solidFill>
+                <a:latin typeface="Malgun Gothic" panose="020B0503020000020004" pitchFamily="50" charset="-127"/>
+              </a:endParaRPr>
+            </a:p>
+          </p:txBody>
+        </p:sp>
+      </p:grpSp>
+      <p:grpSp>
+        <p:nvGrpSpPr>
+          <p:cNvPr id="80" name="out_data">
+            <a:extLst>
+              <a:ext uri="{FF2B5EF4-FFF2-40B4-BE49-F238E27FC236}">
+                <a16:creationId xmlns:a16="http://schemas.microsoft.com/office/drawing/2014/main" id="{77E42DF0-4375-C808-74A4-DDA88876783C}"/>
+              </a:ext>
+            </a:extLst>
+          </p:cNvPr>
+          <p:cNvGrpSpPr/>
+          <p:nvPr/>
+        </p:nvGrpSpPr>
+        <p:grpSpPr>
+          <a:xfrm>
+            <a:off x="10224147" y="5249028"/>
+            <a:ext cx="1160134" cy="188768"/>
+            <a:chOff x="10541000" y="5715000"/>
+            <a:chExt cx="1549400" cy="254000"/>
+          </a:xfrm>
+        </p:grpSpPr>
+        <p:sp>
+          <p:nvSpPr>
+            <p:cNvPr id="78" name="out_data_body">
+              <a:extLst>
+                <a:ext uri="{FF2B5EF4-FFF2-40B4-BE49-F238E27FC236}">
+                  <a16:creationId xmlns:a16="http://schemas.microsoft.com/office/drawing/2014/main" id="{24F6525D-D142-3FD9-74AB-A3C4BF597EBB}"/>
+                </a:ext>
+              </a:extLst>
+            </p:cNvPr>
+            <p:cNvSpPr/>
+            <p:nvPr/>
+          </p:nvSpPr>
+          <p:spPr>
+            <a:xfrm>
+              <a:off x="10668000" y="5715000"/>
+              <a:ext cx="1422400" cy="254000"/>
+            </a:xfrm>
+            <a:prstGeom prst="homePlate">
+              <a:avLst/>
+            </a:prstGeom>
+            <a:solidFill>
+              <a:srgbClr val="DCFCE7"/>
+            </a:solidFill>
+            <a:ln w="15875">
+              <a:solidFill>
+                <a:srgbClr val="16A34A"/>
+              </a:solidFill>
+            </a:ln>
+          </p:spPr>
+          <p:style>
+            <a:lnRef idx="2">
+              <a:schemeClr val="accent1">
+                <a:shade val="15000"/>
+              </a:schemeClr>
+            </a:lnRef>
+            <a:fillRef idx="1">
+              <a:schemeClr val="accent1"/>
+            </a:fillRef>
+            <a:effectRef idx="0">
+              <a:schemeClr val="accent1"/>
+            </a:effectRef>
+            <a:fontRef idx="minor">
+              <a:schemeClr val="lt1"/>
+            </a:fontRef>
+          </p:style>
+          <p:txBody>
+            <a:bodyPr lIns="50800" rIns="76201" rtlCol="0" anchor="ctr"/>
+            <a:lstStyle/>
+            <a:p>
+              <a:r>
+                <a:rPr lang="en-US" altLang="ko-KR" sz="700" b="1">
+                  <a:solidFill>
+                    <a:srgbClr val="1F2937"/>
+                  </a:solidFill>
+                  <a:latin typeface="Malgun Gothic" panose="020B0503020000020004" pitchFamily="50" charset="-127"/>
+                </a:rPr>
+                <a:t>o_fnd_data[7:0]</a:t>
+              </a:r>
+              <a:endParaRPr lang="ko-KR" altLang="en-US" sz="700" b="1">
+                <a:solidFill>
+                  <a:srgbClr val="1F2937"/>
+                </a:solidFill>
+                <a:latin typeface="Malgun Gothic" panose="020B0503020000020004" pitchFamily="50" charset="-127"/>
+              </a:endParaRPr>
+            </a:p>
+          </p:txBody>
+        </p:sp>
+        <p:sp>
+          <p:nvSpPr>
+            <p:cNvPr id="79" name="out_data_pin">
+              <a:extLst>
+                <a:ext uri="{FF2B5EF4-FFF2-40B4-BE49-F238E27FC236}">
+                  <a16:creationId xmlns:a16="http://schemas.microsoft.com/office/drawing/2014/main" id="{1A860BFA-79EB-1348-305E-E0D7B07C86C8}"/>
+                </a:ext>
+              </a:extLst>
+            </p:cNvPr>
+            <p:cNvSpPr/>
+            <p:nvPr/>
+          </p:nvSpPr>
+          <p:spPr>
+            <a:xfrm>
+              <a:off x="10541000" y="5778500"/>
+              <a:ext cx="127000" cy="127000"/>
+            </a:xfrm>
+            <a:prstGeom prst="rect">
+              <a:avLst/>
+            </a:prstGeom>
+            <a:solidFill>
+              <a:srgbClr val="1D4ED8"/>
+            </a:solidFill>
+            <a:ln w="19050" cap="flat" cmpd="sng" algn="ctr">
+              <a:noFill/>
+              <a:prstDash val="solid"/>
+              <a:miter lim="800000"/>
+            </a:ln>
+            <a:effectLst/>
+          </p:spPr>
+          <p:style>
+            <a:lnRef idx="2">
+              <a:schemeClr val="accent1">
+                <a:shade val="15000"/>
+              </a:schemeClr>
+            </a:lnRef>
+            <a:fillRef idx="1">
+              <a:schemeClr val="accent1"/>
+            </a:fillRef>
+            <a:effectRef idx="0">
+              <a:schemeClr val="accent1"/>
+            </a:effectRef>
+            <a:fontRef idx="minor">
+              <a:schemeClr val="lt1"/>
+            </a:fontRef>
+          </p:style>
+          <p:txBody>
+            <a:bodyPr rtlCol="0" anchor="ctr"/>
+            <a:lstStyle/>
+            <a:p>
+              <a:pPr algn="ctr"/>
+              <a:endParaRPr lang="ko-KR" altLang="en-US" sz="1600"/>
+            </a:p>
+          </p:txBody>
+        </p:sp>
+      </p:grpSp>
+      <p:grpSp>
+        <p:nvGrpSpPr>
+          <p:cNvPr id="83" name="out_com">
+            <a:extLst>
+              <a:ext uri="{FF2B5EF4-FFF2-40B4-BE49-F238E27FC236}">
+                <a16:creationId xmlns:a16="http://schemas.microsoft.com/office/drawing/2014/main" id="{862C78DF-7A58-E965-A796-78A3D92AAF96}"/>
+              </a:ext>
+            </a:extLst>
+          </p:cNvPr>
+          <p:cNvGrpSpPr/>
+          <p:nvPr/>
+        </p:nvGrpSpPr>
+        <p:grpSpPr>
+          <a:xfrm>
+            <a:off x="10197780" y="4542815"/>
+            <a:ext cx="1160134" cy="188768"/>
+            <a:chOff x="10541000" y="5080000"/>
+            <a:chExt cx="1549400" cy="254000"/>
+          </a:xfrm>
+        </p:grpSpPr>
+        <p:sp>
+          <p:nvSpPr>
+            <p:cNvPr id="81" name="out_com_body">
+              <a:extLst>
+                <a:ext uri="{FF2B5EF4-FFF2-40B4-BE49-F238E27FC236}">
+                  <a16:creationId xmlns:a16="http://schemas.microsoft.com/office/drawing/2014/main" id="{210F4D82-8A06-B7C6-3AC8-588B9FDFCC04}"/>
+                </a:ext>
+              </a:extLst>
+            </p:cNvPr>
+            <p:cNvSpPr/>
+            <p:nvPr/>
+          </p:nvSpPr>
+          <p:spPr>
+            <a:xfrm>
+              <a:off x="10668000" y="5080000"/>
+              <a:ext cx="1422400" cy="254000"/>
+            </a:xfrm>
+            <a:prstGeom prst="homePlate">
+              <a:avLst/>
+            </a:prstGeom>
+            <a:solidFill>
+              <a:srgbClr val="DCFCE7"/>
+            </a:solidFill>
+            <a:ln w="15875">
+              <a:solidFill>
+                <a:srgbClr val="16A34A"/>
+              </a:solidFill>
+            </a:ln>
+          </p:spPr>
+          <p:style>
+            <a:lnRef idx="2">
+              <a:schemeClr val="accent1">
+                <a:shade val="15000"/>
+              </a:schemeClr>
+            </a:lnRef>
+            <a:fillRef idx="1">
+              <a:schemeClr val="accent1"/>
+            </a:fillRef>
+            <a:effectRef idx="0">
+              <a:schemeClr val="accent1"/>
+            </a:effectRef>
+            <a:fontRef idx="minor">
+              <a:schemeClr val="lt1"/>
+            </a:fontRef>
+          </p:style>
+          <p:txBody>
+            <a:bodyPr lIns="50800" rIns="76201" rtlCol="0" anchor="ctr"/>
+            <a:lstStyle/>
+            <a:p>
+              <a:r>
+                <a:rPr lang="en-US" altLang="ko-KR" sz="700" b="1">
+                  <a:solidFill>
+                    <a:srgbClr val="1F2937"/>
+                  </a:solidFill>
+                  <a:latin typeface="Malgun Gothic" panose="020B0503020000020004" pitchFamily="50" charset="-127"/>
+                </a:rPr>
+                <a:t>o_fnd_com[3:0]</a:t>
+              </a:r>
+              <a:endParaRPr lang="ko-KR" altLang="en-US" sz="700" b="1">
+                <a:solidFill>
+                  <a:srgbClr val="1F2937"/>
+                </a:solidFill>
+                <a:latin typeface="Malgun Gothic" panose="020B0503020000020004" pitchFamily="50" charset="-127"/>
+              </a:endParaRPr>
+            </a:p>
+          </p:txBody>
+        </p:sp>
+        <p:sp>
+          <p:nvSpPr>
+            <p:cNvPr id="82" name="out_com_pin">
+              <a:extLst>
+                <a:ext uri="{FF2B5EF4-FFF2-40B4-BE49-F238E27FC236}">
+                  <a16:creationId xmlns:a16="http://schemas.microsoft.com/office/drawing/2014/main" id="{D2C584A5-0617-FD8F-68A9-F2BFA4BDFAB7}"/>
+                </a:ext>
+              </a:extLst>
+            </p:cNvPr>
+            <p:cNvSpPr/>
+            <p:nvPr/>
+          </p:nvSpPr>
+          <p:spPr>
+            <a:xfrm>
+              <a:off x="10541000" y="5143500"/>
+              <a:ext cx="127000" cy="127000"/>
+            </a:xfrm>
+            <a:prstGeom prst="rect">
+              <a:avLst/>
+            </a:prstGeom>
+            <a:solidFill>
+              <a:srgbClr val="1D4ED8"/>
+            </a:solidFill>
+            <a:ln w="19050" cap="flat" cmpd="sng" algn="ctr">
+              <a:noFill/>
+              <a:prstDash val="solid"/>
+              <a:miter lim="800000"/>
+            </a:ln>
+            <a:effectLst/>
+          </p:spPr>
+          <p:style>
+            <a:lnRef idx="2">
+              <a:schemeClr val="accent1">
+                <a:shade val="15000"/>
+              </a:schemeClr>
+            </a:lnRef>
+            <a:fillRef idx="1">
+              <a:schemeClr val="accent1"/>
+            </a:fillRef>
+            <a:effectRef idx="0">
+              <a:schemeClr val="accent1"/>
+            </a:effectRef>
+            <a:fontRef idx="minor">
+              <a:schemeClr val="lt1"/>
+            </a:fontRef>
+          </p:style>
+          <p:txBody>
+            <a:bodyPr rtlCol="0" anchor="ctr"/>
+            <a:lstStyle/>
+            <a:p>
+              <a:pPr algn="ctr"/>
+              <a:endParaRPr lang="ko-KR" altLang="en-US" sz="1600"/>
+            </a:p>
+          </p:txBody>
+        </p:sp>
+      </p:grpSp>
+      <p:cxnSp>
+        <p:nvCxnSpPr>
+          <p:cNvPr id="94" name="연결선: 꺾임 93">
+            <a:extLst>
+              <a:ext uri="{FF2B5EF4-FFF2-40B4-BE49-F238E27FC236}">
+                <a16:creationId xmlns:a16="http://schemas.microsoft.com/office/drawing/2014/main" id="{DA0D8BC4-729A-FF1C-3475-81B86A450C41}"/>
+              </a:ext>
+            </a:extLst>
+          </p:cNvPr>
+          <p:cNvCxnSpPr>
+            <a:cxnSpLocks/>
+            <a:stCxn id="43" idx="3"/>
+            <a:endCxn id="159" idx="1"/>
+          </p:cNvCxnSpPr>
+          <p:nvPr/>
+        </p:nvCxnSpPr>
+        <p:spPr>
+          <a:xfrm>
+            <a:off x="6785455" y="2326794"/>
+            <a:ext cx="275554" cy="35257"/>
+          </a:xfrm>
+          <a:prstGeom prst="bentConnector3">
+            <a:avLst>
+              <a:gd name="adj1" fmla="val 50000"/>
+            </a:avLst>
+          </a:prstGeom>
+          <a:ln w="31750">
+            <a:solidFill>
+              <a:srgbClr val="1E3A8A"/>
+            </a:solidFill>
+            <a:tailEnd type="triangle"/>
+          </a:ln>
+        </p:spPr>
+        <p:style>
+          <a:lnRef idx="2">
+            <a:schemeClr val="accent1"/>
+          </a:lnRef>
+          <a:fillRef idx="0">
+            <a:schemeClr val="accent1"/>
+          </a:fillRef>
+          <a:effectRef idx="1">
+            <a:schemeClr val="accent1"/>
+          </a:effectRef>
+          <a:fontRef idx="minor">
+            <a:schemeClr val="tx1"/>
+          </a:fontRef>
+        </p:style>
+      </p:cxnSp>
+      <p:cxnSp>
+        <p:nvCxnSpPr>
+          <p:cNvPr id="95" name="연결선: 꺾임 94">
+            <a:extLst>
+              <a:ext uri="{FF2B5EF4-FFF2-40B4-BE49-F238E27FC236}">
+                <a16:creationId xmlns:a16="http://schemas.microsoft.com/office/drawing/2014/main" id="{358305ED-8E75-7C96-9957-1C760AC75551}"/>
+              </a:ext>
+            </a:extLst>
+          </p:cNvPr>
+          <p:cNvCxnSpPr>
+            <a:cxnSpLocks/>
+            <a:stCxn id="45" idx="3"/>
+            <a:endCxn id="162" idx="1"/>
+          </p:cNvCxnSpPr>
+          <p:nvPr/>
+        </p:nvCxnSpPr>
+        <p:spPr>
+          <a:xfrm>
+            <a:off x="6785455" y="2515562"/>
+            <a:ext cx="275554" cy="35257"/>
+          </a:xfrm>
+          <a:prstGeom prst="bentConnector3">
+            <a:avLst>
+              <a:gd name="adj1" fmla="val 50000"/>
+            </a:avLst>
+          </a:prstGeom>
+          <a:ln w="31750">
+            <a:solidFill>
+              <a:srgbClr val="1E3A8A"/>
+            </a:solidFill>
+            <a:tailEnd type="triangle"/>
+          </a:ln>
+        </p:spPr>
+        <p:style>
+          <a:lnRef idx="2">
+            <a:schemeClr val="accent1"/>
+          </a:lnRef>
+          <a:fillRef idx="0">
+            <a:schemeClr val="accent1"/>
+          </a:fillRef>
+          <a:effectRef idx="1">
+            <a:schemeClr val="accent1"/>
+          </a:effectRef>
+          <a:fontRef idx="minor">
+            <a:schemeClr val="tx1"/>
+          </a:fontRef>
+        </p:style>
+      </p:cxnSp>
+      <p:cxnSp>
+        <p:nvCxnSpPr>
+          <p:cNvPr id="96" name="연결선: 꺾임 95">
+            <a:extLst>
+              <a:ext uri="{FF2B5EF4-FFF2-40B4-BE49-F238E27FC236}">
+                <a16:creationId xmlns:a16="http://schemas.microsoft.com/office/drawing/2014/main" id="{6849D1F6-F12C-3F2E-6A4D-25805D93E0AB}"/>
+              </a:ext>
+            </a:extLst>
+          </p:cNvPr>
+          <p:cNvCxnSpPr>
+            <a:cxnSpLocks/>
+            <a:stCxn id="47" idx="3"/>
+            <a:endCxn id="163" idx="1"/>
+          </p:cNvCxnSpPr>
+          <p:nvPr/>
+        </p:nvCxnSpPr>
+        <p:spPr>
+          <a:xfrm>
+            <a:off x="6785455" y="2704330"/>
+            <a:ext cx="275554" cy="36150"/>
+          </a:xfrm>
+          <a:prstGeom prst="bentConnector3">
+            <a:avLst>
+              <a:gd name="adj1" fmla="val 50000"/>
+            </a:avLst>
+          </a:prstGeom>
+          <a:ln w="31750">
+            <a:solidFill>
+              <a:srgbClr val="1E3A8A"/>
+            </a:solidFill>
+            <a:tailEnd type="triangle"/>
+          </a:ln>
+        </p:spPr>
+        <p:style>
+          <a:lnRef idx="2">
+            <a:schemeClr val="accent1"/>
+          </a:lnRef>
+          <a:fillRef idx="0">
+            <a:schemeClr val="accent1"/>
+          </a:fillRef>
+          <a:effectRef idx="1">
+            <a:schemeClr val="accent1"/>
+          </a:effectRef>
+          <a:fontRef idx="minor">
+            <a:schemeClr val="tx1"/>
+          </a:fontRef>
+        </p:style>
+      </p:cxnSp>
+      <p:cxnSp>
+        <p:nvCxnSpPr>
+          <p:cNvPr id="97" name="연결선: 꺾임 96">
+            <a:extLst>
+              <a:ext uri="{FF2B5EF4-FFF2-40B4-BE49-F238E27FC236}">
+                <a16:creationId xmlns:a16="http://schemas.microsoft.com/office/drawing/2014/main" id="{68742BE7-72B8-4D83-1AC8-83901DB75631}"/>
+              </a:ext>
+            </a:extLst>
+          </p:cNvPr>
+          <p:cNvCxnSpPr>
+            <a:cxnSpLocks/>
+            <a:stCxn id="49" idx="3"/>
+            <a:endCxn id="164" idx="1"/>
+          </p:cNvCxnSpPr>
+          <p:nvPr/>
+        </p:nvCxnSpPr>
+        <p:spPr>
+          <a:xfrm>
+            <a:off x="6785455" y="2893098"/>
+            <a:ext cx="275554" cy="36150"/>
+          </a:xfrm>
+          <a:prstGeom prst="bentConnector3">
+            <a:avLst>
+              <a:gd name="adj1" fmla="val 50000"/>
+            </a:avLst>
+          </a:prstGeom>
+          <a:ln w="31750">
+            <a:solidFill>
+              <a:srgbClr val="1E3A8A"/>
+            </a:solidFill>
+            <a:tailEnd type="triangle"/>
+          </a:ln>
+        </p:spPr>
+        <p:style>
+          <a:lnRef idx="2">
+            <a:schemeClr val="accent1"/>
+          </a:lnRef>
+          <a:fillRef idx="0">
+            <a:schemeClr val="accent1"/>
+          </a:fillRef>
+          <a:effectRef idx="1">
+            <a:schemeClr val="accent1"/>
+          </a:effectRef>
+          <a:fontRef idx="minor">
+            <a:schemeClr val="tx1"/>
+          </a:fontRef>
+        </p:style>
+      </p:cxnSp>
+      <p:grpSp>
+        <p:nvGrpSpPr>
+          <p:cNvPr id="137" name="in_b">
+            <a:extLst>
+              <a:ext uri="{FF2B5EF4-FFF2-40B4-BE49-F238E27FC236}">
+                <a16:creationId xmlns:a16="http://schemas.microsoft.com/office/drawing/2014/main" id="{0A3B604A-57A0-6391-59A5-04E7C397BE2D}"/>
+              </a:ext>
+            </a:extLst>
+          </p:cNvPr>
+          <p:cNvGrpSpPr/>
+          <p:nvPr/>
+        </p:nvGrpSpPr>
+        <p:grpSpPr>
+          <a:xfrm>
+            <a:off x="32631" y="4992736"/>
+            <a:ext cx="1160134" cy="188768"/>
+            <a:chOff x="101600" y="2286000"/>
+            <a:chExt cx="1549400" cy="254000"/>
+          </a:xfrm>
+        </p:grpSpPr>
+        <p:sp>
+          <p:nvSpPr>
+            <p:cNvPr id="138" name="in_b_body">
+              <a:extLst>
+                <a:ext uri="{FF2B5EF4-FFF2-40B4-BE49-F238E27FC236}">
+                  <a16:creationId xmlns:a16="http://schemas.microsoft.com/office/drawing/2014/main" id="{A2DC1670-5BAA-AE81-CB23-5DFBBE6B4716}"/>
+                </a:ext>
+              </a:extLst>
+            </p:cNvPr>
+            <p:cNvSpPr/>
+            <p:nvPr/>
+          </p:nvSpPr>
+          <p:spPr>
+            <a:xfrm>
+              <a:off x="101600" y="2286000"/>
+              <a:ext cx="1422400" cy="254000"/>
+            </a:xfrm>
+            <a:prstGeom prst="homePlate">
+              <a:avLst/>
+            </a:prstGeom>
+            <a:solidFill>
+              <a:srgbClr val="DBEAFE"/>
+            </a:solidFill>
+            <a:ln w="15875">
+              <a:solidFill>
+                <a:srgbClr val="2563EB"/>
+              </a:solidFill>
+            </a:ln>
+          </p:spPr>
+          <p:style>
+            <a:lnRef idx="2">
+              <a:schemeClr val="accent1">
+                <a:shade val="15000"/>
+              </a:schemeClr>
+            </a:lnRef>
+            <a:fillRef idx="1">
+              <a:schemeClr val="accent1"/>
+            </a:fillRef>
+            <a:effectRef idx="0">
+              <a:schemeClr val="accent1"/>
+            </a:effectRef>
+            <a:fontRef idx="minor">
+              <a:schemeClr val="lt1"/>
+            </a:fontRef>
+          </p:style>
+          <p:txBody>
+            <a:bodyPr lIns="50800" rIns="76201" rtlCol="0" anchor="ctr"/>
+            <a:lstStyle/>
+            <a:p>
+              <a:r>
+                <a:rPr lang="en-US" altLang="ko-KR" sz="700" b="1">
+                  <a:solidFill>
+                    <a:srgbClr val="1F2937"/>
+                  </a:solidFill>
+                  <a:latin typeface="Malgun Gothic" panose="020B0503020000020004" pitchFamily="50" charset="-127"/>
+                </a:rPr>
+                <a:t>i_clk</a:t>
+              </a:r>
+              <a:endParaRPr lang="ko-KR" altLang="en-US" sz="700" b="1">
+                <a:solidFill>
+                  <a:srgbClr val="1F2937"/>
+                </a:solidFill>
+                <a:latin typeface="Malgun Gothic" panose="020B0503020000020004" pitchFamily="50" charset="-127"/>
+              </a:endParaRPr>
+            </a:p>
+          </p:txBody>
+        </p:sp>
+        <p:sp>
+          <p:nvSpPr>
+            <p:cNvPr id="139" name="in_b_pin">
+              <a:extLst>
+                <a:ext uri="{FF2B5EF4-FFF2-40B4-BE49-F238E27FC236}">
+                  <a16:creationId xmlns:a16="http://schemas.microsoft.com/office/drawing/2014/main" id="{9C8B289D-D37E-9D84-6B86-77BE1C39C4FF}"/>
+                </a:ext>
+              </a:extLst>
+            </p:cNvPr>
+            <p:cNvSpPr/>
+            <p:nvPr/>
+          </p:nvSpPr>
+          <p:spPr>
+            <a:xfrm>
+              <a:off x="1524000" y="2349500"/>
+              <a:ext cx="127000" cy="127000"/>
+            </a:xfrm>
+            <a:prstGeom prst="rect">
+              <a:avLst/>
+            </a:prstGeom>
+            <a:solidFill>
+              <a:srgbClr val="15803D"/>
+            </a:solidFill>
+            <a:ln w="19050" cap="flat" cmpd="sng" algn="ctr">
+              <a:noFill/>
+              <a:prstDash val="solid"/>
+              <a:miter lim="800000"/>
+            </a:ln>
+            <a:effectLst/>
+          </p:spPr>
+          <p:style>
+            <a:lnRef idx="2">
+              <a:schemeClr val="accent1">
+                <a:shade val="15000"/>
+              </a:schemeClr>
+            </a:lnRef>
+            <a:fillRef idx="1">
+              <a:schemeClr val="accent1"/>
+            </a:fillRef>
+            <a:effectRef idx="0">
+              <a:schemeClr val="accent1"/>
+            </a:effectRef>
+            <a:fontRef idx="minor">
+              <a:schemeClr val="lt1"/>
+            </a:fontRef>
+          </p:style>
+          <p:txBody>
+            <a:bodyPr rtlCol="0" anchor="ctr"/>
+            <a:lstStyle/>
+            <a:p>
+              <a:pPr algn="ctr"/>
+              <a:endParaRPr lang="ko-KR" altLang="en-US" sz="1600"/>
+            </a:p>
+          </p:txBody>
+        </p:sp>
+      </p:grpSp>
+      <p:grpSp>
+        <p:nvGrpSpPr>
+          <p:cNvPr id="140" name="in_b">
+            <a:extLst>
+              <a:ext uri="{FF2B5EF4-FFF2-40B4-BE49-F238E27FC236}">
+                <a16:creationId xmlns:a16="http://schemas.microsoft.com/office/drawing/2014/main" id="{A288025E-BED5-B0B3-B65D-A389AABB3C56}"/>
+              </a:ext>
+            </a:extLst>
+          </p:cNvPr>
+          <p:cNvGrpSpPr/>
+          <p:nvPr/>
+        </p:nvGrpSpPr>
+        <p:grpSpPr>
+          <a:xfrm>
+            <a:off x="32631" y="5472999"/>
+            <a:ext cx="1160134" cy="188768"/>
+            <a:chOff x="101600" y="2286000"/>
+            <a:chExt cx="1549400" cy="254000"/>
+          </a:xfrm>
+        </p:grpSpPr>
+        <p:sp>
+          <p:nvSpPr>
+            <p:cNvPr id="141" name="in_b_body">
+              <a:extLst>
+                <a:ext uri="{FF2B5EF4-FFF2-40B4-BE49-F238E27FC236}">
+                  <a16:creationId xmlns:a16="http://schemas.microsoft.com/office/drawing/2014/main" id="{B3233398-10FD-8A6E-BD07-4A5A4101D620}"/>
+                </a:ext>
+              </a:extLst>
+            </p:cNvPr>
+            <p:cNvSpPr/>
+            <p:nvPr/>
+          </p:nvSpPr>
+          <p:spPr>
+            <a:xfrm>
+              <a:off x="101600" y="2286000"/>
+              <a:ext cx="1422400" cy="254000"/>
+            </a:xfrm>
+            <a:prstGeom prst="homePlate">
+              <a:avLst/>
+            </a:prstGeom>
+            <a:solidFill>
+              <a:srgbClr val="DBEAFE"/>
+            </a:solidFill>
+            <a:ln w="15875">
+              <a:solidFill>
+                <a:srgbClr val="2563EB"/>
+              </a:solidFill>
+            </a:ln>
+          </p:spPr>
+          <p:style>
+            <a:lnRef idx="2">
+              <a:schemeClr val="accent1">
+                <a:shade val="15000"/>
+              </a:schemeClr>
+            </a:lnRef>
+            <a:fillRef idx="1">
+              <a:schemeClr val="accent1"/>
+            </a:fillRef>
+            <a:effectRef idx="0">
+              <a:schemeClr val="accent1"/>
+            </a:effectRef>
+            <a:fontRef idx="minor">
+              <a:schemeClr val="lt1"/>
+            </a:fontRef>
+          </p:style>
+          <p:txBody>
+            <a:bodyPr lIns="50800" rIns="76201" rtlCol="0" anchor="ctr"/>
+            <a:lstStyle/>
+            <a:p>
+              <a:r>
+                <a:rPr lang="en-US" altLang="ko-KR" sz="700" b="1">
+                  <a:solidFill>
+                    <a:srgbClr val="1F2937"/>
+                  </a:solidFill>
+                  <a:latin typeface="Malgun Gothic" panose="020B0503020000020004" pitchFamily="50" charset="-127"/>
+                </a:rPr>
+                <a:t>i_reset</a:t>
+              </a:r>
+              <a:endParaRPr lang="ko-KR" altLang="en-US" sz="700" b="1">
+                <a:solidFill>
+                  <a:srgbClr val="1F2937"/>
+                </a:solidFill>
+                <a:latin typeface="Malgun Gothic" panose="020B0503020000020004" pitchFamily="50" charset="-127"/>
+              </a:endParaRPr>
+            </a:p>
+          </p:txBody>
+        </p:sp>
+        <p:sp>
+          <p:nvSpPr>
+            <p:cNvPr id="142" name="in_b_pin">
+              <a:extLst>
+                <a:ext uri="{FF2B5EF4-FFF2-40B4-BE49-F238E27FC236}">
+                  <a16:creationId xmlns:a16="http://schemas.microsoft.com/office/drawing/2014/main" id="{2B47849D-0BC9-4A92-3B1F-E0A369097F7A}"/>
+                </a:ext>
+              </a:extLst>
+            </p:cNvPr>
+            <p:cNvSpPr/>
+            <p:nvPr/>
+          </p:nvSpPr>
+          <p:spPr>
+            <a:xfrm>
+              <a:off x="1524000" y="2349500"/>
+              <a:ext cx="127000" cy="127000"/>
+            </a:xfrm>
+            <a:prstGeom prst="rect">
+              <a:avLst/>
+            </a:prstGeom>
+            <a:solidFill>
+              <a:srgbClr val="15803D"/>
+            </a:solidFill>
+            <a:ln w="19050" cap="flat" cmpd="sng" algn="ctr">
+              <a:noFill/>
+              <a:prstDash val="solid"/>
+              <a:miter lim="800000"/>
+            </a:ln>
+            <a:effectLst/>
+          </p:spPr>
+          <p:style>
+            <a:lnRef idx="2">
+              <a:schemeClr val="accent1">
+                <a:shade val="15000"/>
+              </a:schemeClr>
+            </a:lnRef>
+            <a:fillRef idx="1">
+              <a:schemeClr val="accent1"/>
+            </a:fillRef>
+            <a:effectRef idx="0">
+              <a:schemeClr val="accent1"/>
+            </a:effectRef>
+            <a:fontRef idx="minor">
+              <a:schemeClr val="lt1"/>
+            </a:fontRef>
+          </p:style>
+          <p:txBody>
+            <a:bodyPr rtlCol="0" anchor="ctr"/>
+            <a:lstStyle/>
+            <a:p>
+              <a:pPr algn="ctr"/>
+              <a:endParaRPr lang="ko-KR" altLang="en-US" sz="1600"/>
+            </a:p>
+          </p:txBody>
+        </p:sp>
+      </p:grpSp>
+      <p:cxnSp>
+        <p:nvCxnSpPr>
+          <p:cNvPr id="143" name="연결선: 꺾임 142">
+            <a:extLst>
+              <a:ext uri="{FF2B5EF4-FFF2-40B4-BE49-F238E27FC236}">
+                <a16:creationId xmlns:a16="http://schemas.microsoft.com/office/drawing/2014/main" id="{7FC603BF-3AB2-D2E2-DC9C-6336D9C8481E}"/>
+              </a:ext>
+            </a:extLst>
+          </p:cNvPr>
+          <p:cNvCxnSpPr>
+            <a:cxnSpLocks/>
+            <a:stCxn id="139" idx="3"/>
+            <a:endCxn id="59" idx="1"/>
+          </p:cNvCxnSpPr>
+          <p:nvPr/>
+        </p:nvCxnSpPr>
+        <p:spPr>
+          <a:xfrm flipV="1">
+            <a:off x="1192765" y="4475134"/>
+            <a:ext cx="4037920" cy="611986"/>
+          </a:xfrm>
+          <a:prstGeom prst="bentConnector3">
+            <a:avLst>
+              <a:gd name="adj1" fmla="val 50000"/>
+            </a:avLst>
+          </a:prstGeom>
+          <a:ln w="31750">
+            <a:solidFill>
+              <a:srgbClr val="1E3A8A"/>
+            </a:solidFill>
+            <a:tailEnd type="triangle"/>
+          </a:ln>
+        </p:spPr>
+        <p:style>
+          <a:lnRef idx="2">
+            <a:schemeClr val="accent1"/>
+          </a:lnRef>
+          <a:fillRef idx="0">
+            <a:schemeClr val="accent1"/>
+          </a:fillRef>
+          <a:effectRef idx="1">
+            <a:schemeClr val="accent1"/>
+          </a:effectRef>
+          <a:fontRef idx="minor">
+            <a:schemeClr val="tx1"/>
+          </a:fontRef>
+        </p:style>
+      </p:cxnSp>
+      <p:cxnSp>
+        <p:nvCxnSpPr>
+          <p:cNvPr id="189" name="연결선: 꺾임 188">
+            <a:extLst>
+              <a:ext uri="{FF2B5EF4-FFF2-40B4-BE49-F238E27FC236}">
+                <a16:creationId xmlns:a16="http://schemas.microsoft.com/office/drawing/2014/main" id="{5EC74F22-E3C7-33B5-AD89-36452B294E85}"/>
+              </a:ext>
+            </a:extLst>
+          </p:cNvPr>
+          <p:cNvCxnSpPr>
+            <a:cxnSpLocks/>
+            <a:stCxn id="184" idx="3"/>
+            <a:endCxn id="73" idx="1"/>
+          </p:cNvCxnSpPr>
+          <p:nvPr/>
+        </p:nvCxnSpPr>
+        <p:spPr>
+          <a:xfrm flipH="1">
+            <a:off x="7728821" y="3419209"/>
+            <a:ext cx="781924" cy="1822064"/>
+          </a:xfrm>
+          <a:prstGeom prst="bentConnector5">
+            <a:avLst>
+              <a:gd name="adj1" fmla="val -21891"/>
+              <a:gd name="adj2" fmla="val 50000"/>
+              <a:gd name="adj3" fmla="val 121891"/>
+            </a:avLst>
+          </a:prstGeom>
+          <a:ln w="31750">
+            <a:solidFill>
+              <a:srgbClr val="1E3A8A"/>
+            </a:solidFill>
+            <a:tailEnd type="triangle"/>
+          </a:ln>
+        </p:spPr>
+        <p:style>
+          <a:lnRef idx="2">
+            <a:schemeClr val="accent1"/>
+          </a:lnRef>
+          <a:fillRef idx="0">
+            <a:schemeClr val="accent1"/>
+          </a:fillRef>
+          <a:effectRef idx="1">
+            <a:schemeClr val="accent1"/>
+          </a:effectRef>
+          <a:fontRef idx="minor">
+            <a:schemeClr val="tx1"/>
+          </a:fontRef>
+        </p:style>
+      </p:cxnSp>
+      <p:cxnSp>
+        <p:nvCxnSpPr>
+          <p:cNvPr id="191" name="연결선: 꺾임 190">
+            <a:extLst>
+              <a:ext uri="{FF2B5EF4-FFF2-40B4-BE49-F238E27FC236}">
+                <a16:creationId xmlns:a16="http://schemas.microsoft.com/office/drawing/2014/main" id="{AA29D397-9480-EFE8-7D21-0AB55253EE48}"/>
+              </a:ext>
+            </a:extLst>
+          </p:cNvPr>
+          <p:cNvCxnSpPr>
+            <a:cxnSpLocks/>
+            <a:stCxn id="75" idx="3"/>
+            <a:endCxn id="79" idx="1"/>
+          </p:cNvCxnSpPr>
+          <p:nvPr/>
+        </p:nvCxnSpPr>
+        <p:spPr>
+          <a:xfrm>
+            <a:off x="9060121" y="5241273"/>
+            <a:ext cx="1164026" cy="102139"/>
+          </a:xfrm>
+          <a:prstGeom prst="bentConnector3">
+            <a:avLst>
+              <a:gd name="adj1" fmla="val 50000"/>
+            </a:avLst>
+          </a:prstGeom>
+          <a:ln w="31750">
+            <a:solidFill>
+              <a:srgbClr val="1E3A8A"/>
+            </a:solidFill>
+            <a:tailEnd type="triangle"/>
+          </a:ln>
+        </p:spPr>
+        <p:style>
+          <a:lnRef idx="2">
+            <a:schemeClr val="accent1"/>
+          </a:lnRef>
+          <a:fillRef idx="0">
+            <a:schemeClr val="accent1"/>
+          </a:fillRef>
+          <a:effectRef idx="1">
+            <a:schemeClr val="accent1"/>
+          </a:effectRef>
+          <a:fontRef idx="minor">
+            <a:schemeClr val="tx1"/>
+          </a:fontRef>
+        </p:style>
+      </p:cxnSp>
+      <p:grpSp>
+        <p:nvGrpSpPr>
+          <p:cNvPr id="206" name="그룹 205">
+            <a:extLst>
+              <a:ext uri="{FF2B5EF4-FFF2-40B4-BE49-F238E27FC236}">
+                <a16:creationId xmlns:a16="http://schemas.microsoft.com/office/drawing/2014/main" id="{677BAEF6-C41D-4030-4FF1-D8E5D1E905D8}"/>
+              </a:ext>
+            </a:extLst>
+          </p:cNvPr>
+          <p:cNvGrpSpPr/>
+          <p:nvPr/>
+        </p:nvGrpSpPr>
+        <p:grpSpPr>
+          <a:xfrm>
+            <a:off x="6954680" y="1993960"/>
+            <a:ext cx="1556065" cy="1734948"/>
+            <a:chOff x="5871442" y="4152311"/>
+            <a:chExt cx="2078182" cy="2334486"/>
+          </a:xfrm>
+        </p:grpSpPr>
+        <p:grpSp>
+          <p:nvGrpSpPr>
+            <p:cNvPr id="205" name="그룹 204">
+              <a:extLst>
+                <a:ext uri="{FF2B5EF4-FFF2-40B4-BE49-F238E27FC236}">
+                  <a16:creationId xmlns:a16="http://schemas.microsoft.com/office/drawing/2014/main" id="{89E3962F-5F93-C142-62A2-1F905D36D7A8}"/>
+                </a:ext>
+              </a:extLst>
+            </p:cNvPr>
+            <p:cNvGrpSpPr/>
+            <p:nvPr/>
+          </p:nvGrpSpPr>
+          <p:grpSpPr>
+            <a:xfrm>
+              <a:off x="6013449" y="4584101"/>
+              <a:ext cx="136815" cy="1730201"/>
+              <a:chOff x="6013449" y="4584101"/>
+              <a:chExt cx="136815" cy="1730201"/>
+            </a:xfrm>
+          </p:grpSpPr>
+          <p:sp>
+            <p:nvSpPr>
+              <p:cNvPr id="149" name="U_SPLIT_pin_i_data[8:0]">
+                <a:extLst>
+                  <a:ext uri="{FF2B5EF4-FFF2-40B4-BE49-F238E27FC236}">
+                    <a16:creationId xmlns:a16="http://schemas.microsoft.com/office/drawing/2014/main" id="{653A30E4-CB10-B270-C3CB-B3379C5C6C83}"/>
+                  </a:ext>
+                </a:extLst>
+              </p:cNvPr>
+              <p:cNvSpPr/>
+              <p:nvPr/>
+            </p:nvSpPr>
+            <p:spPr>
+              <a:xfrm>
+                <a:off x="6019801" y="5915939"/>
+                <a:ext cx="127000" cy="127000"/>
+              </a:xfrm>
+              <a:prstGeom prst="rect">
+                <a:avLst/>
+              </a:prstGeom>
+              <a:solidFill>
+                <a:srgbClr val="1D4ED8"/>
+              </a:solidFill>
+              <a:ln w="19050" cap="flat" cmpd="sng" algn="ctr">
+                <a:noFill/>
+                <a:prstDash val="solid"/>
+                <a:miter lim="800000"/>
+              </a:ln>
+              <a:effectLst/>
+            </p:spPr>
+            <p:style>
+              <a:lnRef idx="2">
+                <a:schemeClr val="accent1">
+                  <a:shade val="15000"/>
+                </a:schemeClr>
+              </a:lnRef>
+              <a:fillRef idx="1">
+                <a:schemeClr val="accent1"/>
+              </a:fillRef>
+              <a:effectRef idx="0">
+                <a:schemeClr val="accent1"/>
+              </a:effectRef>
+              <a:fontRef idx="minor">
+                <a:schemeClr val="lt1"/>
+              </a:fontRef>
+            </p:style>
+            <p:txBody>
+              <a:bodyPr rtlCol="0" anchor="ctr"/>
+              <a:lstStyle/>
+              <a:p>
+                <a:pPr algn="ctr"/>
+                <a:endParaRPr lang="ko-KR" altLang="en-US" sz="1600"/>
+              </a:p>
+            </p:txBody>
+          </p:sp>
+          <p:sp>
+            <p:nvSpPr>
+              <p:cNvPr id="151" name="U_SPLIT_pin_i_data[8:0]">
+                <a:extLst>
+                  <a:ext uri="{FF2B5EF4-FFF2-40B4-BE49-F238E27FC236}">
+                    <a16:creationId xmlns:a16="http://schemas.microsoft.com/office/drawing/2014/main" id="{5C142853-ADA9-FE31-A752-7B40A924D98A}"/>
+                  </a:ext>
+                </a:extLst>
+              </p:cNvPr>
+              <p:cNvSpPr/>
+              <p:nvPr/>
+            </p:nvSpPr>
+            <p:spPr>
+              <a:xfrm>
+                <a:off x="6023264" y="6187302"/>
+                <a:ext cx="127000" cy="127000"/>
+              </a:xfrm>
+              <a:prstGeom prst="rect">
+                <a:avLst/>
+              </a:prstGeom>
+              <a:solidFill>
+                <a:srgbClr val="1D4ED8"/>
+              </a:solidFill>
+              <a:ln w="19050" cap="flat" cmpd="sng" algn="ctr">
+                <a:noFill/>
+                <a:prstDash val="solid"/>
+                <a:miter lim="800000"/>
+              </a:ln>
+              <a:effectLst/>
+            </p:spPr>
+            <p:style>
+              <a:lnRef idx="2">
+                <a:schemeClr val="accent1">
+                  <a:shade val="15000"/>
+                </a:schemeClr>
+              </a:lnRef>
+              <a:fillRef idx="1">
+                <a:schemeClr val="accent1"/>
+              </a:fillRef>
+              <a:effectRef idx="0">
+                <a:schemeClr val="accent1"/>
+              </a:effectRef>
+              <a:fontRef idx="minor">
+                <a:schemeClr val="lt1"/>
+              </a:fontRef>
+            </p:style>
+            <p:txBody>
+              <a:bodyPr rtlCol="0" anchor="ctr"/>
+              <a:lstStyle/>
+              <a:p>
+                <a:pPr algn="ctr"/>
+                <a:endParaRPr lang="ko-KR" altLang="en-US" sz="1600"/>
+              </a:p>
+            </p:txBody>
+          </p:sp>
+          <p:grpSp>
+            <p:nvGrpSpPr>
+              <p:cNvPr id="165" name="그룹 164">
+                <a:extLst>
+                  <a:ext uri="{FF2B5EF4-FFF2-40B4-BE49-F238E27FC236}">
+                    <a16:creationId xmlns:a16="http://schemas.microsoft.com/office/drawing/2014/main" id="{26CAED22-ACB6-17E6-E8E5-8E9A2169CBAD}"/>
+                  </a:ext>
+                </a:extLst>
+              </p:cNvPr>
+              <p:cNvGrpSpPr/>
+              <p:nvPr/>
+            </p:nvGrpSpPr>
+            <p:grpSpPr>
+              <a:xfrm>
+                <a:off x="6013449" y="4584101"/>
+                <a:ext cx="127000" cy="890202"/>
+                <a:chOff x="8175625" y="3542100"/>
+                <a:chExt cx="127000" cy="890202"/>
+              </a:xfrm>
+            </p:grpSpPr>
+            <p:sp>
+              <p:nvSpPr>
+                <p:cNvPr id="159" name="U_SPLIT_pin_i_data[8:0]">
+                  <a:extLst>
+                    <a:ext uri="{FF2B5EF4-FFF2-40B4-BE49-F238E27FC236}">
+                      <a16:creationId xmlns:a16="http://schemas.microsoft.com/office/drawing/2014/main" id="{3FC21D98-D02B-161B-6EB5-422979076748}"/>
+                    </a:ext>
+                  </a:extLst>
+                </p:cNvPr>
+                <p:cNvSpPr/>
+                <p:nvPr/>
+              </p:nvSpPr>
+              <p:spPr>
+                <a:xfrm>
+                  <a:off x="8175625" y="3542100"/>
+                  <a:ext cx="127000" cy="127000"/>
+                </a:xfrm>
+                <a:prstGeom prst="rect">
+                  <a:avLst/>
+                </a:prstGeom>
+                <a:solidFill>
+                  <a:srgbClr val="1D4ED8"/>
+                </a:solidFill>
+                <a:ln w="19050" cap="flat" cmpd="sng" algn="ctr">
+                  <a:noFill/>
+                  <a:prstDash val="solid"/>
+                  <a:miter lim="800000"/>
+                </a:ln>
+                <a:effectLst/>
+              </p:spPr>
+              <p:style>
+                <a:lnRef idx="2">
+                  <a:schemeClr val="accent1">
+                    <a:shade val="15000"/>
+                  </a:schemeClr>
+                </a:lnRef>
+                <a:fillRef idx="1">
+                  <a:schemeClr val="accent1"/>
+                </a:fillRef>
+                <a:effectRef idx="0">
+                  <a:schemeClr val="accent1"/>
+                </a:effectRef>
+                <a:fontRef idx="minor">
+                  <a:schemeClr val="lt1"/>
+                </a:fontRef>
+              </p:style>
+              <p:txBody>
+                <a:bodyPr rtlCol="0" anchor="ctr"/>
+                <a:lstStyle/>
+                <a:p>
+                  <a:pPr algn="ctr"/>
+                  <a:endParaRPr lang="ko-KR" altLang="en-US" sz="1600"/>
+                </a:p>
+              </p:txBody>
+            </p:sp>
+            <p:sp>
+              <p:nvSpPr>
+                <p:cNvPr id="162" name="U_SPLIT_pin_i_data[8:0]">
+                  <a:extLst>
+                    <a:ext uri="{FF2B5EF4-FFF2-40B4-BE49-F238E27FC236}">
+                      <a16:creationId xmlns:a16="http://schemas.microsoft.com/office/drawing/2014/main" id="{342A792B-FFF2-FBF8-9DA1-AB12C15BD414}"/>
+                    </a:ext>
+                  </a:extLst>
+                </p:cNvPr>
+                <p:cNvSpPr/>
+                <p:nvPr/>
+              </p:nvSpPr>
+              <p:spPr>
+                <a:xfrm>
+                  <a:off x="8175625" y="3796100"/>
+                  <a:ext cx="127000" cy="127000"/>
+                </a:xfrm>
+                <a:prstGeom prst="rect">
+                  <a:avLst/>
+                </a:prstGeom>
+                <a:solidFill>
+                  <a:srgbClr val="1D4ED8"/>
+                </a:solidFill>
+                <a:ln w="19050" cap="flat" cmpd="sng" algn="ctr">
+                  <a:noFill/>
+                  <a:prstDash val="solid"/>
+                  <a:miter lim="800000"/>
+                </a:ln>
+                <a:effectLst/>
+              </p:spPr>
+              <p:style>
+                <a:lnRef idx="2">
+                  <a:schemeClr val="accent1">
+                    <a:shade val="15000"/>
+                  </a:schemeClr>
+                </a:lnRef>
+                <a:fillRef idx="1">
+                  <a:schemeClr val="accent1"/>
+                </a:fillRef>
+                <a:effectRef idx="0">
+                  <a:schemeClr val="accent1"/>
+                </a:effectRef>
+                <a:fontRef idx="minor">
+                  <a:schemeClr val="lt1"/>
+                </a:fontRef>
+              </p:style>
+              <p:txBody>
+                <a:bodyPr rtlCol="0" anchor="ctr"/>
+                <a:lstStyle/>
+                <a:p>
+                  <a:pPr algn="ctr"/>
+                  <a:endParaRPr lang="ko-KR" altLang="en-US" sz="1600"/>
+                </a:p>
+              </p:txBody>
+            </p:sp>
+            <p:sp>
+              <p:nvSpPr>
+                <p:cNvPr id="163" name="U_SPLIT_pin_i_data[8:0]">
+                  <a:extLst>
+                    <a:ext uri="{FF2B5EF4-FFF2-40B4-BE49-F238E27FC236}">
+                      <a16:creationId xmlns:a16="http://schemas.microsoft.com/office/drawing/2014/main" id="{DA4ED3D7-B46E-0885-AC96-B40CCFAF0557}"/>
+                    </a:ext>
+                  </a:extLst>
+                </p:cNvPr>
+                <p:cNvSpPr/>
+                <p:nvPr/>
+              </p:nvSpPr>
+              <p:spPr>
+                <a:xfrm>
+                  <a:off x="8175625" y="4051302"/>
+                  <a:ext cx="127000" cy="127000"/>
+                </a:xfrm>
+                <a:prstGeom prst="rect">
+                  <a:avLst/>
+                </a:prstGeom>
+                <a:solidFill>
+                  <a:srgbClr val="1D4ED8"/>
+                </a:solidFill>
+                <a:ln w="19050" cap="flat" cmpd="sng" algn="ctr">
+                  <a:noFill/>
+                  <a:prstDash val="solid"/>
+                  <a:miter lim="800000"/>
+                </a:ln>
+                <a:effectLst/>
+              </p:spPr>
+              <p:style>
+                <a:lnRef idx="2">
+                  <a:schemeClr val="accent1">
+                    <a:shade val="15000"/>
+                  </a:schemeClr>
+                </a:lnRef>
+                <a:fillRef idx="1">
+                  <a:schemeClr val="accent1"/>
+                </a:fillRef>
+                <a:effectRef idx="0">
+                  <a:schemeClr val="accent1"/>
+                </a:effectRef>
+                <a:fontRef idx="minor">
+                  <a:schemeClr val="lt1"/>
+                </a:fontRef>
+              </p:style>
+              <p:txBody>
+                <a:bodyPr rtlCol="0" anchor="ctr"/>
+                <a:lstStyle/>
+                <a:p>
+                  <a:pPr algn="ctr"/>
+                  <a:endParaRPr lang="ko-KR" altLang="en-US" sz="1600"/>
+                </a:p>
+              </p:txBody>
+            </p:sp>
+            <p:sp>
+              <p:nvSpPr>
+                <p:cNvPr id="164" name="U_SPLIT_pin_i_data[8:0]">
+                  <a:extLst>
+                    <a:ext uri="{FF2B5EF4-FFF2-40B4-BE49-F238E27FC236}">
+                      <a16:creationId xmlns:a16="http://schemas.microsoft.com/office/drawing/2014/main" id="{78CE23D3-2063-64F6-C420-398A2A1457C4}"/>
+                    </a:ext>
+                  </a:extLst>
+                </p:cNvPr>
+                <p:cNvSpPr/>
+                <p:nvPr/>
+              </p:nvSpPr>
+              <p:spPr>
+                <a:xfrm>
+                  <a:off x="8175625" y="4305302"/>
+                  <a:ext cx="127000" cy="127000"/>
+                </a:xfrm>
+                <a:prstGeom prst="rect">
+                  <a:avLst/>
+                </a:prstGeom>
+                <a:solidFill>
+                  <a:srgbClr val="1D4ED8"/>
+                </a:solidFill>
+                <a:ln w="19050" cap="flat" cmpd="sng" algn="ctr">
+                  <a:noFill/>
+                  <a:prstDash val="solid"/>
+                  <a:miter lim="800000"/>
+                </a:ln>
+                <a:effectLst/>
+              </p:spPr>
+              <p:style>
+                <a:lnRef idx="2">
+                  <a:schemeClr val="accent1">
+                    <a:shade val="15000"/>
+                  </a:schemeClr>
+                </a:lnRef>
+                <a:fillRef idx="1">
+                  <a:schemeClr val="accent1"/>
+                </a:fillRef>
+                <a:effectRef idx="0">
+                  <a:schemeClr val="accent1"/>
+                </a:effectRef>
+                <a:fontRef idx="minor">
+                  <a:schemeClr val="lt1"/>
+                </a:fontRef>
+              </p:style>
+              <p:txBody>
+                <a:bodyPr rtlCol="0" anchor="ctr"/>
+                <a:lstStyle/>
+                <a:p>
+                  <a:pPr algn="ctr"/>
+                  <a:endParaRPr lang="ko-KR" altLang="en-US" sz="1600"/>
+                </a:p>
+              </p:txBody>
+            </p:sp>
+          </p:grpSp>
+        </p:grpSp>
+        <p:grpSp>
+          <p:nvGrpSpPr>
+            <p:cNvPr id="203" name="그룹 202">
+              <a:extLst>
+                <a:ext uri="{FF2B5EF4-FFF2-40B4-BE49-F238E27FC236}">
+                  <a16:creationId xmlns:a16="http://schemas.microsoft.com/office/drawing/2014/main" id="{DCD45EC2-963E-8F9F-865D-9D5A26C6F09A}"/>
+                </a:ext>
+              </a:extLst>
+            </p:cNvPr>
+            <p:cNvGrpSpPr/>
+            <p:nvPr/>
+          </p:nvGrpSpPr>
+          <p:grpSpPr>
+            <a:xfrm>
+              <a:off x="5871442" y="4152311"/>
+              <a:ext cx="2078182" cy="2334486"/>
+              <a:chOff x="5857586" y="4154059"/>
+              <a:chExt cx="2078182" cy="2334486"/>
+            </a:xfrm>
+          </p:grpSpPr>
+          <p:sp>
+            <p:nvSpPr>
+              <p:cNvPr id="136" name="U_SPLIT_body">
+                <a:extLst>
+                  <a:ext uri="{FF2B5EF4-FFF2-40B4-BE49-F238E27FC236}">
+                    <a16:creationId xmlns:a16="http://schemas.microsoft.com/office/drawing/2014/main" id="{203B8C6E-740D-DC76-A76E-8736BF4A2FCB}"/>
+                  </a:ext>
+                </a:extLst>
+              </p:cNvPr>
+              <p:cNvSpPr/>
+              <p:nvPr/>
+            </p:nvSpPr>
+            <p:spPr>
+              <a:xfrm>
+                <a:off x="6140449" y="4154059"/>
+                <a:ext cx="1651001" cy="2334486"/>
+              </a:xfrm>
+              <a:prstGeom prst="roundRect">
+                <a:avLst>
+                  <a:gd name="adj" fmla="val 6000"/>
+                </a:avLst>
+              </a:prstGeom>
+              <a:solidFill>
+                <a:srgbClr val="ECFEFF"/>
+              </a:solidFill>
+              <a:ln w="19050">
+                <a:solidFill>
+                  <a:srgbClr val="0E7490"/>
+                </a:solidFill>
+              </a:ln>
+            </p:spPr>
+            <p:style>
+              <a:lnRef idx="2">
+                <a:schemeClr val="accent1">
+                  <a:shade val="15000"/>
+                </a:schemeClr>
+              </a:lnRef>
+              <a:fillRef idx="1">
+                <a:schemeClr val="accent1"/>
+              </a:fillRef>
+              <a:effectRef idx="0">
+                <a:schemeClr val="accent1"/>
+              </a:effectRef>
+              <a:fontRef idx="minor">
+                <a:schemeClr val="lt1"/>
+              </a:fontRef>
+            </p:style>
+            <p:txBody>
+              <a:bodyPr lIns="25401" tIns="38100" rIns="25401" rtlCol="0" anchor="t"/>
+              <a:lstStyle/>
+              <a:p>
+                <a:pPr algn="ctr"/>
+                <a:r>
+                  <a:rPr lang="en-US" altLang="ko-KR" sz="900" b="1">
+                    <a:solidFill>
+                      <a:srgbClr val="0E7490"/>
+                    </a:solidFill>
+                    <a:latin typeface="Malgun Gothic" panose="020B0503020000020004" pitchFamily="50" charset="-127"/>
+                  </a:rPr>
+                  <a:t>Fnd_Controller</a:t>
+                </a:r>
+              </a:p>
+            </p:txBody>
+          </p:sp>
+          <p:sp>
+            <p:nvSpPr>
+              <p:cNvPr id="155" name="U_SPLIT_lbl_i_data[8:0]">
+                <a:extLst>
+                  <a:ext uri="{FF2B5EF4-FFF2-40B4-BE49-F238E27FC236}">
+                    <a16:creationId xmlns:a16="http://schemas.microsoft.com/office/drawing/2014/main" id="{C1B7A4C7-ABB2-410D-EA36-712DAE87F94B}"/>
+                  </a:ext>
+                </a:extLst>
+              </p:cNvPr>
+              <p:cNvSpPr txBox="1"/>
+              <p:nvPr/>
+            </p:nvSpPr>
+            <p:spPr>
+              <a:xfrm>
+                <a:off x="6227039" y="5933302"/>
+                <a:ext cx="952501" cy="276999"/>
+              </a:xfrm>
+              <a:prstGeom prst="rect">
+                <a:avLst/>
+              </a:prstGeom>
+              <a:noFill/>
+            </p:spPr>
+            <p:txBody>
+              <a:bodyPr vert="horz" wrap="square" lIns="0" tIns="0" rIns="0" bIns="0" rtlCol="0">
+                <a:noAutofit/>
+              </a:bodyPr>
+              <a:lstStyle/>
+              <a:p>
+                <a:r>
+                  <a:rPr lang="en-US" altLang="ko-KR" sz="600" b="1">
+                    <a:solidFill>
+                      <a:srgbClr val="1F2937"/>
+                    </a:solidFill>
+                    <a:latin typeface="Malgun Gothic" panose="020B0503020000020004" pitchFamily="50" charset="-127"/>
+                  </a:rPr>
+                  <a:t>i_clk_1kHz</a:t>
+                </a:r>
+                <a:endParaRPr lang="ko-KR" altLang="en-US" sz="600" b="1">
+                  <a:solidFill>
+                    <a:srgbClr val="1F2937"/>
+                  </a:solidFill>
+                  <a:latin typeface="Malgun Gothic" panose="020B0503020000020004" pitchFamily="50" charset="-127"/>
+                </a:endParaRPr>
+              </a:p>
+            </p:txBody>
+          </p:sp>
+          <p:sp>
+            <p:nvSpPr>
+              <p:cNvPr id="157" name="U_SPLIT_lbl_i_data[8:0]">
+                <a:extLst>
+                  <a:ext uri="{FF2B5EF4-FFF2-40B4-BE49-F238E27FC236}">
+                    <a16:creationId xmlns:a16="http://schemas.microsoft.com/office/drawing/2014/main" id="{85EE1D90-D230-75D0-22B5-A13149194E5F}"/>
+                  </a:ext>
+                </a:extLst>
+              </p:cNvPr>
+              <p:cNvSpPr txBox="1"/>
+              <p:nvPr/>
+            </p:nvSpPr>
+            <p:spPr>
+              <a:xfrm>
+                <a:off x="6232236" y="6174600"/>
+                <a:ext cx="952501" cy="276999"/>
+              </a:xfrm>
+              <a:prstGeom prst="rect">
+                <a:avLst/>
+              </a:prstGeom>
+              <a:noFill/>
+            </p:spPr>
+            <p:txBody>
+              <a:bodyPr vert="horz" wrap="square" lIns="0" tIns="0" rIns="0" bIns="0" rtlCol="0">
+                <a:noAutofit/>
+              </a:bodyPr>
+              <a:lstStyle/>
+              <a:p>
+                <a:r>
+                  <a:rPr lang="en-US" altLang="ko-KR" sz="600" b="1">
+                    <a:solidFill>
+                      <a:srgbClr val="1F2937"/>
+                    </a:solidFill>
+                    <a:latin typeface="Malgun Gothic" panose="020B0503020000020004" pitchFamily="50" charset="-127"/>
+                  </a:rPr>
+                  <a:t>i_reset_n</a:t>
+                </a:r>
+                <a:endParaRPr lang="ko-KR" altLang="en-US" sz="600" b="1">
+                  <a:solidFill>
+                    <a:srgbClr val="1F2937"/>
+                  </a:solidFill>
+                  <a:latin typeface="Malgun Gothic" panose="020B0503020000020004" pitchFamily="50" charset="-127"/>
+                </a:endParaRPr>
+              </a:p>
+            </p:txBody>
+          </p:sp>
+          <p:sp>
+            <p:nvSpPr>
+              <p:cNvPr id="174" name="U_SPLIT_lbl_o_digit_1[3:0]">
+                <a:extLst>
+                  <a:ext uri="{FF2B5EF4-FFF2-40B4-BE49-F238E27FC236}">
+                    <a16:creationId xmlns:a16="http://schemas.microsoft.com/office/drawing/2014/main" id="{FD36A202-AD05-C8A7-6982-EDAC397FCC77}"/>
+                  </a:ext>
+                </a:extLst>
+              </p:cNvPr>
+              <p:cNvSpPr txBox="1"/>
+              <p:nvPr/>
+            </p:nvSpPr>
+            <p:spPr>
+              <a:xfrm>
+                <a:off x="5857586" y="4581399"/>
+                <a:ext cx="952501" cy="276999"/>
+              </a:xfrm>
+              <a:prstGeom prst="rect">
+                <a:avLst/>
+              </a:prstGeom>
+              <a:noFill/>
+            </p:spPr>
+            <p:txBody>
+              <a:bodyPr vert="horz" wrap="square" lIns="0" tIns="0" rIns="0" bIns="0" rtlCol="0">
+                <a:noAutofit/>
+              </a:bodyPr>
+              <a:lstStyle/>
+              <a:p>
+                <a:pPr algn="r"/>
+                <a:r>
+                  <a:rPr lang="en-US" altLang="ko-KR" sz="600" b="1">
+                    <a:solidFill>
+                      <a:srgbClr val="1F2937"/>
+                    </a:solidFill>
+                    <a:latin typeface="Malgun Gothic" panose="020B0503020000020004" pitchFamily="50" charset="-127"/>
+                  </a:rPr>
+                  <a:t>i_digit_1[3:0]</a:t>
+                </a:r>
+                <a:endParaRPr lang="ko-KR" altLang="en-US" sz="600" b="1">
+                  <a:solidFill>
+                    <a:srgbClr val="1F2937"/>
+                  </a:solidFill>
+                  <a:latin typeface="Malgun Gothic" panose="020B0503020000020004" pitchFamily="50" charset="-127"/>
+                </a:endParaRPr>
+              </a:p>
+            </p:txBody>
+          </p:sp>
+          <p:sp>
+            <p:nvSpPr>
+              <p:cNvPr id="176" name="U_SPLIT_lbl_o_digit_1[3:0]">
+                <a:extLst>
+                  <a:ext uri="{FF2B5EF4-FFF2-40B4-BE49-F238E27FC236}">
+                    <a16:creationId xmlns:a16="http://schemas.microsoft.com/office/drawing/2014/main" id="{64499B78-6FA2-0887-5F82-5F1C2BFCAF77}"/>
+                  </a:ext>
+                </a:extLst>
+              </p:cNvPr>
+              <p:cNvSpPr txBox="1"/>
+              <p:nvPr/>
+            </p:nvSpPr>
+            <p:spPr>
+              <a:xfrm>
+                <a:off x="5915888" y="4863019"/>
+                <a:ext cx="952501" cy="276999"/>
+              </a:xfrm>
+              <a:prstGeom prst="rect">
+                <a:avLst/>
+              </a:prstGeom>
+              <a:noFill/>
+            </p:spPr>
+            <p:txBody>
+              <a:bodyPr vert="horz" wrap="square" lIns="0" tIns="0" rIns="0" bIns="0" rtlCol="0">
+                <a:noAutofit/>
+              </a:bodyPr>
+              <a:lstStyle/>
+              <a:p>
+                <a:pPr algn="r"/>
+                <a:r>
+                  <a:rPr lang="en-US" altLang="ko-KR" sz="600" b="1">
+                    <a:solidFill>
+                      <a:srgbClr val="1F2937"/>
+                    </a:solidFill>
+                    <a:latin typeface="Malgun Gothic" panose="020B0503020000020004" pitchFamily="50" charset="-127"/>
+                  </a:rPr>
+                  <a:t>i_digit_10[3:0]</a:t>
+                </a:r>
+                <a:endParaRPr lang="ko-KR" altLang="en-US" sz="600" b="1">
+                  <a:solidFill>
+                    <a:srgbClr val="1F2937"/>
+                  </a:solidFill>
+                  <a:latin typeface="Malgun Gothic" panose="020B0503020000020004" pitchFamily="50" charset="-127"/>
+                </a:endParaRPr>
+              </a:p>
+            </p:txBody>
+          </p:sp>
+          <p:sp>
+            <p:nvSpPr>
+              <p:cNvPr id="177" name="U_SPLIT_lbl_o_digit_1[3:0]">
+                <a:extLst>
+                  <a:ext uri="{FF2B5EF4-FFF2-40B4-BE49-F238E27FC236}">
+                    <a16:creationId xmlns:a16="http://schemas.microsoft.com/office/drawing/2014/main" id="{C25DA11D-94D1-3DC3-FA3A-AAE536138019}"/>
+                  </a:ext>
+                </a:extLst>
+              </p:cNvPr>
+              <p:cNvSpPr txBox="1"/>
+              <p:nvPr/>
+            </p:nvSpPr>
+            <p:spPr>
+              <a:xfrm>
+                <a:off x="5962068" y="5093858"/>
+                <a:ext cx="952501" cy="276999"/>
+              </a:xfrm>
+              <a:prstGeom prst="rect">
+                <a:avLst/>
+              </a:prstGeom>
+              <a:noFill/>
+            </p:spPr>
+            <p:txBody>
+              <a:bodyPr vert="horz" wrap="square" lIns="0" tIns="0" rIns="0" bIns="0" rtlCol="0">
+                <a:noAutofit/>
+              </a:bodyPr>
+              <a:lstStyle/>
+              <a:p>
+                <a:pPr algn="r"/>
+                <a:r>
+                  <a:rPr lang="en-US" altLang="ko-KR" sz="600" b="1">
+                    <a:solidFill>
+                      <a:srgbClr val="1F2937"/>
+                    </a:solidFill>
+                    <a:latin typeface="Malgun Gothic" panose="020B0503020000020004" pitchFamily="50" charset="-127"/>
+                  </a:rPr>
+                  <a:t>i_digit_100[3:0]</a:t>
+                </a:r>
+                <a:endParaRPr lang="ko-KR" altLang="en-US" sz="600" b="1">
+                  <a:solidFill>
+                    <a:srgbClr val="1F2937"/>
+                  </a:solidFill>
+                  <a:latin typeface="Malgun Gothic" panose="020B0503020000020004" pitchFamily="50" charset="-127"/>
+                </a:endParaRPr>
+              </a:p>
+            </p:txBody>
+          </p:sp>
+          <p:sp>
+            <p:nvSpPr>
+              <p:cNvPr id="178" name="U_SPLIT_lbl_o_digit_1[3:0]">
+                <a:extLst>
+                  <a:ext uri="{FF2B5EF4-FFF2-40B4-BE49-F238E27FC236}">
+                    <a16:creationId xmlns:a16="http://schemas.microsoft.com/office/drawing/2014/main" id="{396BC4B1-ECC1-5580-AB32-6AEE50214BEF}"/>
+                  </a:ext>
+                </a:extLst>
+              </p:cNvPr>
+              <p:cNvSpPr txBox="1"/>
+              <p:nvPr/>
+            </p:nvSpPr>
+            <p:spPr>
+              <a:xfrm>
+                <a:off x="6017484" y="5334770"/>
+                <a:ext cx="952501" cy="276999"/>
+              </a:xfrm>
+              <a:prstGeom prst="rect">
+                <a:avLst/>
+              </a:prstGeom>
+              <a:noFill/>
+            </p:spPr>
+            <p:txBody>
+              <a:bodyPr vert="horz" wrap="square" lIns="0" tIns="0" rIns="0" bIns="0" rtlCol="0">
+                <a:noAutofit/>
+              </a:bodyPr>
+              <a:lstStyle/>
+              <a:p>
+                <a:pPr algn="r"/>
+                <a:r>
+                  <a:rPr lang="en-US" altLang="ko-KR" sz="600" b="1">
+                    <a:solidFill>
+                      <a:srgbClr val="1F2937"/>
+                    </a:solidFill>
+                    <a:latin typeface="Malgun Gothic" panose="020B0503020000020004" pitchFamily="50" charset="-127"/>
+                  </a:rPr>
+                  <a:t>i_digit_1000[3:0]</a:t>
+                </a:r>
+                <a:endParaRPr lang="ko-KR" altLang="en-US" sz="600" b="1">
+                  <a:solidFill>
+                    <a:srgbClr val="1F2937"/>
+                  </a:solidFill>
+                  <a:latin typeface="Malgun Gothic" panose="020B0503020000020004" pitchFamily="50" charset="-127"/>
+                </a:endParaRPr>
+              </a:p>
+            </p:txBody>
+          </p:sp>
+          <p:sp>
+            <p:nvSpPr>
+              <p:cNvPr id="184" name="U_SPLIT_pin_o_digit_1[3:0]">
+                <a:extLst>
+                  <a:ext uri="{FF2B5EF4-FFF2-40B4-BE49-F238E27FC236}">
+                    <a16:creationId xmlns:a16="http://schemas.microsoft.com/office/drawing/2014/main" id="{E8B5B123-BB02-C000-A54F-30593A4EADB1}"/>
+                  </a:ext>
+                </a:extLst>
+              </p:cNvPr>
+              <p:cNvSpPr/>
+              <p:nvPr/>
+            </p:nvSpPr>
+            <p:spPr>
+              <a:xfrm>
+                <a:off x="7808768" y="6008325"/>
+                <a:ext cx="127000" cy="127000"/>
+              </a:xfrm>
+              <a:prstGeom prst="rect">
+                <a:avLst/>
+              </a:prstGeom>
+              <a:solidFill>
+                <a:srgbClr val="15803D"/>
+              </a:solidFill>
+              <a:ln w="19050" cap="flat" cmpd="sng" algn="ctr">
+                <a:noFill/>
+                <a:prstDash val="solid"/>
+                <a:miter lim="800000"/>
+              </a:ln>
+              <a:effectLst/>
+            </p:spPr>
+            <p:style>
+              <a:lnRef idx="2">
+                <a:schemeClr val="accent1">
+                  <a:shade val="15000"/>
+                </a:schemeClr>
+              </a:lnRef>
+              <a:fillRef idx="1">
+                <a:schemeClr val="accent1"/>
+              </a:fillRef>
+              <a:effectRef idx="0">
+                <a:schemeClr val="accent1"/>
+              </a:effectRef>
+              <a:fontRef idx="minor">
+                <a:schemeClr val="lt1"/>
+              </a:fontRef>
+            </p:style>
+            <p:txBody>
+              <a:bodyPr rtlCol="0" anchor="ctr"/>
+              <a:lstStyle/>
+              <a:p>
+                <a:pPr algn="ctr"/>
+                <a:endParaRPr lang="ko-KR" altLang="en-US" sz="1600"/>
+              </a:p>
+            </p:txBody>
+          </p:sp>
+          <p:sp>
+            <p:nvSpPr>
+              <p:cNvPr id="186" name="U_SPLIT_lbl_o_digit_1[3:0]">
+                <a:extLst>
+                  <a:ext uri="{FF2B5EF4-FFF2-40B4-BE49-F238E27FC236}">
+                    <a16:creationId xmlns:a16="http://schemas.microsoft.com/office/drawing/2014/main" id="{CC0902E7-5832-CB9C-8688-4146F14A1ACC}"/>
+                  </a:ext>
+                </a:extLst>
+              </p:cNvPr>
+              <p:cNvSpPr txBox="1"/>
+              <p:nvPr/>
+            </p:nvSpPr>
+            <p:spPr>
+              <a:xfrm>
+                <a:off x="6789016" y="5999089"/>
+                <a:ext cx="952501" cy="276999"/>
+              </a:xfrm>
+              <a:prstGeom prst="rect">
+                <a:avLst/>
+              </a:prstGeom>
+              <a:noFill/>
+            </p:spPr>
+            <p:txBody>
+              <a:bodyPr vert="horz" wrap="square" lIns="0" tIns="0" rIns="0" bIns="0" rtlCol="0">
+                <a:noAutofit/>
+              </a:bodyPr>
+              <a:lstStyle/>
+              <a:p>
+                <a:pPr algn="r"/>
+                <a:r>
+                  <a:rPr lang="en-US" altLang="ko-KR" sz="600" b="1">
+                    <a:solidFill>
+                      <a:srgbClr val="1F2937"/>
+                    </a:solidFill>
+                    <a:latin typeface="Malgun Gothic" panose="020B0503020000020004" pitchFamily="50" charset="-127"/>
+                  </a:rPr>
+                  <a:t>o_hex[3:0]</a:t>
+                </a:r>
+                <a:endParaRPr lang="ko-KR" altLang="en-US" sz="600" b="1">
+                  <a:solidFill>
+                    <a:srgbClr val="1F2937"/>
+                  </a:solidFill>
+                  <a:latin typeface="Malgun Gothic" panose="020B0503020000020004" pitchFamily="50" charset="-127"/>
+                </a:endParaRPr>
+              </a:p>
+            </p:txBody>
+          </p:sp>
+          <p:sp>
+            <p:nvSpPr>
+              <p:cNvPr id="194" name="U_SPLIT_pin_o_digit_1[3:0]">
+                <a:extLst>
+                  <a:ext uri="{FF2B5EF4-FFF2-40B4-BE49-F238E27FC236}">
+                    <a16:creationId xmlns:a16="http://schemas.microsoft.com/office/drawing/2014/main" id="{305804EA-198E-4524-BAD0-053982CAC5CF}"/>
+                  </a:ext>
+                </a:extLst>
+              </p:cNvPr>
+              <p:cNvSpPr/>
+              <p:nvPr/>
+            </p:nvSpPr>
+            <p:spPr>
+              <a:xfrm>
+                <a:off x="7791450" y="4995746"/>
+                <a:ext cx="127000" cy="127000"/>
+              </a:xfrm>
+              <a:prstGeom prst="rect">
+                <a:avLst/>
+              </a:prstGeom>
+              <a:solidFill>
+                <a:srgbClr val="15803D"/>
+              </a:solidFill>
+              <a:ln w="19050" cap="flat" cmpd="sng" algn="ctr">
+                <a:noFill/>
+                <a:prstDash val="solid"/>
+                <a:miter lim="800000"/>
+              </a:ln>
+              <a:effectLst/>
+            </p:spPr>
+            <p:style>
+              <a:lnRef idx="2">
+                <a:schemeClr val="accent1">
+                  <a:shade val="15000"/>
+                </a:schemeClr>
+              </a:lnRef>
+              <a:fillRef idx="1">
+                <a:schemeClr val="accent1"/>
+              </a:fillRef>
+              <a:effectRef idx="0">
+                <a:schemeClr val="accent1"/>
+              </a:effectRef>
+              <a:fontRef idx="minor">
+                <a:schemeClr val="lt1"/>
+              </a:fontRef>
+            </p:style>
+            <p:txBody>
+              <a:bodyPr rtlCol="0" anchor="ctr"/>
+              <a:lstStyle/>
+              <a:p>
+                <a:pPr algn="ctr"/>
+                <a:endParaRPr lang="ko-KR" altLang="en-US" sz="1600"/>
+              </a:p>
+            </p:txBody>
+          </p:sp>
+          <p:sp>
+            <p:nvSpPr>
+              <p:cNvPr id="202" name="U_SPLIT_lbl_o_digit_1[3:0]">
+                <a:extLst>
+                  <a:ext uri="{FF2B5EF4-FFF2-40B4-BE49-F238E27FC236}">
+                    <a16:creationId xmlns:a16="http://schemas.microsoft.com/office/drawing/2014/main" id="{8514F27F-09C0-FB9E-3C3C-BEE222656D3E}"/>
+                  </a:ext>
+                </a:extLst>
+              </p:cNvPr>
+              <p:cNvSpPr txBox="1"/>
+              <p:nvPr/>
+            </p:nvSpPr>
+            <p:spPr>
+              <a:xfrm>
+                <a:off x="6827979" y="4985508"/>
+                <a:ext cx="952501" cy="276999"/>
+              </a:xfrm>
+              <a:prstGeom prst="rect">
+                <a:avLst/>
+              </a:prstGeom>
+              <a:noFill/>
+            </p:spPr>
+            <p:txBody>
+              <a:bodyPr vert="horz" wrap="square" lIns="0" tIns="0" rIns="0" bIns="0" rtlCol="0">
+                <a:noAutofit/>
+              </a:bodyPr>
+              <a:lstStyle/>
+              <a:p>
+                <a:pPr algn="r"/>
+                <a:r>
+                  <a:rPr lang="en-US" altLang="ko-KR" sz="600" b="1">
+                    <a:solidFill>
+                      <a:srgbClr val="1F2937"/>
+                    </a:solidFill>
+                    <a:latin typeface="Malgun Gothic" panose="020B0503020000020004" pitchFamily="50" charset="-127"/>
+                  </a:rPr>
+                  <a:t>o_fnd_com[3:0]</a:t>
+                </a:r>
+                <a:endParaRPr lang="ko-KR" altLang="en-US" sz="600" b="1">
+                  <a:solidFill>
+                    <a:srgbClr val="1F2937"/>
+                  </a:solidFill>
+                  <a:latin typeface="Malgun Gothic" panose="020B0503020000020004" pitchFamily="50" charset="-127"/>
+                </a:endParaRPr>
+              </a:p>
+            </p:txBody>
+          </p:sp>
+        </p:grpSp>
+      </p:grpSp>
+      <p:cxnSp>
+        <p:nvCxnSpPr>
+          <p:cNvPr id="63" name="연결선: 꺾임 62">
+            <a:extLst>
+              <a:ext uri="{FF2B5EF4-FFF2-40B4-BE49-F238E27FC236}">
+                <a16:creationId xmlns:a16="http://schemas.microsoft.com/office/drawing/2014/main" id="{6DD974DB-0AC8-560B-498E-FEBBFE4085CB}"/>
+              </a:ext>
+            </a:extLst>
+          </p:cNvPr>
+          <p:cNvCxnSpPr>
+            <a:cxnSpLocks/>
+            <a:stCxn id="142" idx="3"/>
+            <a:endCxn id="71" idx="1"/>
+          </p:cNvCxnSpPr>
+          <p:nvPr/>
+        </p:nvCxnSpPr>
+        <p:spPr>
+          <a:xfrm flipV="1">
+            <a:off x="1192765" y="5036778"/>
+            <a:ext cx="4043638" cy="530605"/>
+          </a:xfrm>
+          <a:prstGeom prst="bentConnector3">
+            <a:avLst>
+              <a:gd name="adj1" fmla="val 50000"/>
+            </a:avLst>
+          </a:prstGeom>
+          <a:ln w="31750">
+            <a:solidFill>
+              <a:srgbClr val="1E3A8A"/>
+            </a:solidFill>
+            <a:tailEnd type="triangle"/>
+          </a:ln>
+        </p:spPr>
+        <p:style>
+          <a:lnRef idx="2">
+            <a:schemeClr val="accent1"/>
+          </a:lnRef>
+          <a:fillRef idx="0">
+            <a:schemeClr val="accent1"/>
+          </a:fillRef>
+          <a:effectRef idx="1">
+            <a:schemeClr val="accent1"/>
+          </a:effectRef>
+          <a:fontRef idx="minor">
+            <a:schemeClr val="tx1"/>
+          </a:fontRef>
+        </p:style>
+      </p:cxnSp>
+      <p:cxnSp>
+        <p:nvCxnSpPr>
+          <p:cNvPr id="18" name="연결선: 꺾임 17">
+            <a:extLst>
+              <a:ext uri="{FF2B5EF4-FFF2-40B4-BE49-F238E27FC236}">
+                <a16:creationId xmlns:a16="http://schemas.microsoft.com/office/drawing/2014/main" id="{DB843A2E-8488-FCDF-3E49-463A46E56232}"/>
+              </a:ext>
+            </a:extLst>
+          </p:cNvPr>
+          <p:cNvCxnSpPr>
+            <a:cxnSpLocks/>
+            <a:endCxn id="82" idx="1"/>
+          </p:cNvCxnSpPr>
+          <p:nvPr/>
+        </p:nvCxnSpPr>
+        <p:spPr>
+          <a:xfrm rot="16200000" flipH="1">
+            <a:off x="8353236" y="2792654"/>
+            <a:ext cx="1970930" cy="1718159"/>
+          </a:xfrm>
+          <a:prstGeom prst="bentConnector2">
+            <a:avLst/>
+          </a:prstGeom>
+          <a:ln w="31750">
+            <a:solidFill>
+              <a:srgbClr val="1E3A8A"/>
+            </a:solidFill>
+            <a:tailEnd type="triangle"/>
+          </a:ln>
+        </p:spPr>
+        <p:style>
+          <a:lnRef idx="2">
+            <a:schemeClr val="accent1"/>
+          </a:lnRef>
+          <a:fillRef idx="0">
+            <a:schemeClr val="accent1"/>
+          </a:fillRef>
+          <a:effectRef idx="1">
+            <a:schemeClr val="accent1"/>
+          </a:effectRef>
+          <a:fontRef idx="minor">
+            <a:schemeClr val="tx1"/>
+          </a:fontRef>
+        </p:style>
+      </p:cxnSp>
+      <p:grpSp>
+        <p:nvGrpSpPr>
+          <p:cNvPr id="54" name="U_SPLIT">
+            <a:extLst>
+              <a:ext uri="{FF2B5EF4-FFF2-40B4-BE49-F238E27FC236}">
+                <a16:creationId xmlns:a16="http://schemas.microsoft.com/office/drawing/2014/main" id="{61EF202F-252D-4D56-AE13-B7EA8D48DE41}"/>
+              </a:ext>
+            </a:extLst>
+          </p:cNvPr>
+          <p:cNvGrpSpPr/>
+          <p:nvPr/>
+        </p:nvGrpSpPr>
+        <p:grpSpPr>
+          <a:xfrm>
+            <a:off x="5230685" y="4105184"/>
+            <a:ext cx="1236209" cy="1056998"/>
+            <a:chOff x="6477000" y="2476500"/>
+            <a:chExt cx="1905000" cy="1524000"/>
+          </a:xfrm>
+        </p:grpSpPr>
+        <p:sp>
+          <p:nvSpPr>
+            <p:cNvPr id="55" name="U_SPLIT_body">
+              <a:extLst>
+                <a:ext uri="{FF2B5EF4-FFF2-40B4-BE49-F238E27FC236}">
+                  <a16:creationId xmlns:a16="http://schemas.microsoft.com/office/drawing/2014/main" id="{4FE55462-8ABD-BA35-69C0-168572CAD60B}"/>
+                </a:ext>
+              </a:extLst>
+            </p:cNvPr>
+            <p:cNvSpPr/>
+            <p:nvPr/>
+          </p:nvSpPr>
+          <p:spPr>
+            <a:xfrm>
+              <a:off x="6604000" y="2476500"/>
+              <a:ext cx="1651000" cy="1524000"/>
+            </a:xfrm>
+            <a:prstGeom prst="roundRect">
+              <a:avLst>
+                <a:gd name="adj" fmla="val 6000"/>
+              </a:avLst>
+            </a:prstGeom>
+            <a:solidFill>
+              <a:srgbClr val="ECFEFF"/>
+            </a:solidFill>
+            <a:ln w="19050">
+              <a:solidFill>
+                <a:srgbClr val="0E7490"/>
+              </a:solidFill>
+            </a:ln>
+          </p:spPr>
+          <p:style>
+            <a:lnRef idx="2">
+              <a:schemeClr val="accent1">
+                <a:shade val="15000"/>
+              </a:schemeClr>
+            </a:lnRef>
+            <a:fillRef idx="1">
+              <a:schemeClr val="accent1"/>
+            </a:fillRef>
+            <a:effectRef idx="0">
+              <a:schemeClr val="accent1"/>
+            </a:effectRef>
+            <a:fontRef idx="minor">
+              <a:schemeClr val="lt1"/>
+            </a:fontRef>
+          </p:style>
+          <p:txBody>
+            <a:bodyPr lIns="25401" tIns="38100" rIns="25401" rtlCol="0" anchor="t"/>
+            <a:lstStyle/>
+            <a:p>
+              <a:pPr algn="ctr"/>
+              <a:r>
+                <a:rPr lang="en-US" altLang="ko-KR" sz="900" b="1">
+                  <a:solidFill>
+                    <a:srgbClr val="0E7490"/>
+                  </a:solidFill>
+                  <a:latin typeface="Malgun Gothic" panose="020B0503020000020004" pitchFamily="50" charset="-127"/>
+                </a:rPr>
+                <a:t>clock_div</a:t>
+              </a:r>
+            </a:p>
+            <a:p>
+              <a:pPr algn="ctr"/>
+              <a:endParaRPr lang="ko-KR" altLang="en-US" sz="600">
+                <a:solidFill>
+                  <a:srgbClr val="6B7280"/>
+                </a:solidFill>
+                <a:latin typeface="Malgun Gothic" panose="020B0503020000020004" pitchFamily="50" charset="-127"/>
+              </a:endParaRPr>
+            </a:p>
+          </p:txBody>
+        </p:sp>
+        <p:sp>
+          <p:nvSpPr>
+            <p:cNvPr id="59" name="U_SPLIT_pin_i_data[8:0]">
+              <a:extLst>
+                <a:ext uri="{FF2B5EF4-FFF2-40B4-BE49-F238E27FC236}">
+                  <a16:creationId xmlns:a16="http://schemas.microsoft.com/office/drawing/2014/main" id="{F7270276-C36A-750E-77AB-2BBC7E32D0A1}"/>
+                </a:ext>
+              </a:extLst>
+            </p:cNvPr>
+            <p:cNvSpPr/>
+            <p:nvPr/>
+          </p:nvSpPr>
+          <p:spPr>
+            <a:xfrm>
+              <a:off x="6477000" y="2946400"/>
+              <a:ext cx="127000" cy="127000"/>
+            </a:xfrm>
+            <a:prstGeom prst="rect">
+              <a:avLst/>
+            </a:prstGeom>
+            <a:solidFill>
+              <a:srgbClr val="1D4ED8"/>
+            </a:solidFill>
+            <a:ln w="19050" cap="flat" cmpd="sng" algn="ctr">
+              <a:noFill/>
+              <a:prstDash val="solid"/>
+              <a:miter lim="800000"/>
+            </a:ln>
+            <a:effectLst/>
+          </p:spPr>
+          <p:style>
+            <a:lnRef idx="2">
+              <a:schemeClr val="accent1">
+                <a:shade val="15000"/>
+              </a:schemeClr>
+            </a:lnRef>
+            <a:fillRef idx="1">
+              <a:schemeClr val="accent1"/>
+            </a:fillRef>
+            <a:effectRef idx="0">
+              <a:schemeClr val="accent1"/>
+            </a:effectRef>
+            <a:fontRef idx="minor">
+              <a:schemeClr val="lt1"/>
+            </a:fontRef>
+          </p:style>
+          <p:txBody>
+            <a:bodyPr rtlCol="0" anchor="ctr"/>
+            <a:lstStyle/>
+            <a:p>
+              <a:pPr algn="ctr"/>
+              <a:endParaRPr lang="ko-KR" altLang="en-US" sz="1600"/>
+            </a:p>
+          </p:txBody>
+        </p:sp>
+        <p:sp>
+          <p:nvSpPr>
+            <p:cNvPr id="60" name="U_SPLIT_lbl_i_data[8:0]">
+              <a:extLst>
+                <a:ext uri="{FF2B5EF4-FFF2-40B4-BE49-F238E27FC236}">
+                  <a16:creationId xmlns:a16="http://schemas.microsoft.com/office/drawing/2014/main" id="{95111889-1243-80AD-B9F5-9ED550A30A2A}"/>
+                </a:ext>
+              </a:extLst>
+            </p:cNvPr>
+            <p:cNvSpPr txBox="1"/>
+            <p:nvPr/>
+          </p:nvSpPr>
+          <p:spPr>
+            <a:xfrm>
+              <a:off x="6654800" y="2921000"/>
+              <a:ext cx="952500" cy="276999"/>
+            </a:xfrm>
+            <a:prstGeom prst="rect">
+              <a:avLst/>
+            </a:prstGeom>
+            <a:noFill/>
+          </p:spPr>
+          <p:txBody>
+            <a:bodyPr vert="horz" wrap="square" lIns="0" tIns="0" rIns="0" bIns="0" rtlCol="0">
+              <a:noAutofit/>
+            </a:bodyPr>
+            <a:lstStyle/>
+            <a:p>
+              <a:r>
+                <a:rPr lang="en-US" altLang="ko-KR" sz="600" b="1">
+                  <a:solidFill>
+                    <a:srgbClr val="1F2937"/>
+                  </a:solidFill>
+                  <a:latin typeface="Malgun Gothic" panose="020B0503020000020004" pitchFamily="50" charset="-127"/>
+                </a:rPr>
+                <a:t>i_clk</a:t>
+              </a:r>
+              <a:endParaRPr lang="ko-KR" altLang="en-US" sz="600" b="1">
+                <a:solidFill>
+                  <a:srgbClr val="1F2937"/>
+                </a:solidFill>
+                <a:latin typeface="Malgun Gothic" panose="020B0503020000020004" pitchFamily="50" charset="-127"/>
+              </a:endParaRPr>
+            </a:p>
+          </p:txBody>
+        </p:sp>
+        <p:sp>
+          <p:nvSpPr>
+            <p:cNvPr id="61" name="U_SPLIT_pin_o_digit_1000[3:0]">
+              <a:extLst>
+                <a:ext uri="{FF2B5EF4-FFF2-40B4-BE49-F238E27FC236}">
+                  <a16:creationId xmlns:a16="http://schemas.microsoft.com/office/drawing/2014/main" id="{1CEB1FC7-D362-BF43-4A77-509C0AB349C2}"/>
+                </a:ext>
+              </a:extLst>
+            </p:cNvPr>
+            <p:cNvSpPr/>
+            <p:nvPr/>
+          </p:nvSpPr>
+          <p:spPr>
+            <a:xfrm>
+              <a:off x="8255000" y="3708400"/>
+              <a:ext cx="127000" cy="127000"/>
+            </a:xfrm>
+            <a:prstGeom prst="rect">
+              <a:avLst/>
+            </a:prstGeom>
+            <a:solidFill>
+              <a:srgbClr val="15803D"/>
+            </a:solidFill>
+            <a:ln w="19050" cap="flat" cmpd="sng" algn="ctr">
+              <a:noFill/>
+              <a:prstDash val="solid"/>
+              <a:miter lim="800000"/>
+            </a:ln>
+            <a:effectLst/>
+          </p:spPr>
+          <p:style>
+            <a:lnRef idx="2">
+              <a:schemeClr val="accent1">
+                <a:shade val="15000"/>
+              </a:schemeClr>
+            </a:lnRef>
+            <a:fillRef idx="1">
+              <a:schemeClr val="accent1"/>
+            </a:fillRef>
+            <a:effectRef idx="0">
+              <a:schemeClr val="accent1"/>
+            </a:effectRef>
+            <a:fontRef idx="minor">
+              <a:schemeClr val="lt1"/>
+            </a:fontRef>
+          </p:style>
+          <p:txBody>
+            <a:bodyPr rtlCol="0" anchor="ctr"/>
+            <a:lstStyle/>
+            <a:p>
+              <a:pPr algn="ctr"/>
+              <a:endParaRPr lang="ko-KR" altLang="en-US" sz="1600"/>
+            </a:p>
+          </p:txBody>
+        </p:sp>
+        <p:sp>
+          <p:nvSpPr>
+            <p:cNvPr id="64" name="U_SPLIT_lbl_o_digit_1000[3:0]">
+              <a:extLst>
+                <a:ext uri="{FF2B5EF4-FFF2-40B4-BE49-F238E27FC236}">
+                  <a16:creationId xmlns:a16="http://schemas.microsoft.com/office/drawing/2014/main" id="{8BE4570E-AA66-4671-B7EF-390A307396BA}"/>
+                </a:ext>
+              </a:extLst>
+            </p:cNvPr>
+            <p:cNvSpPr txBox="1"/>
+            <p:nvPr/>
+          </p:nvSpPr>
+          <p:spPr>
+            <a:xfrm>
+              <a:off x="7251700" y="3683000"/>
+              <a:ext cx="952500" cy="276999"/>
+            </a:xfrm>
+            <a:prstGeom prst="rect">
+              <a:avLst/>
+            </a:prstGeom>
+            <a:noFill/>
+          </p:spPr>
+          <p:txBody>
+            <a:bodyPr vert="horz" wrap="square" lIns="0" tIns="0" rIns="0" bIns="0" rtlCol="0">
+              <a:noAutofit/>
+            </a:bodyPr>
+            <a:lstStyle/>
+            <a:p>
+              <a:pPr algn="r"/>
+              <a:r>
+                <a:rPr lang="en-US" altLang="ko-KR" sz="600" b="1">
+                  <a:solidFill>
+                    <a:srgbClr val="1F2937"/>
+                  </a:solidFill>
+                  <a:latin typeface="Malgun Gothic" panose="020B0503020000020004" pitchFamily="50" charset="-127"/>
+                </a:rPr>
+                <a:t>o_clk_1kHz</a:t>
+              </a:r>
+              <a:endParaRPr lang="ko-KR" altLang="en-US" sz="600" b="1">
+                <a:solidFill>
+                  <a:srgbClr val="1F2937"/>
+                </a:solidFill>
+                <a:latin typeface="Malgun Gothic" panose="020B0503020000020004" pitchFamily="50" charset="-127"/>
+              </a:endParaRPr>
+            </a:p>
+          </p:txBody>
+        </p:sp>
+      </p:grpSp>
+      <p:sp>
+        <p:nvSpPr>
+          <p:cNvPr id="68" name="U_SPLIT_lbl_i_data[8:0]">
+            <a:extLst>
+              <a:ext uri="{FF2B5EF4-FFF2-40B4-BE49-F238E27FC236}">
+                <a16:creationId xmlns:a16="http://schemas.microsoft.com/office/drawing/2014/main" id="{CC58DEBD-7F94-2C34-A173-A3D02A497847}"/>
+              </a:ext>
+            </a:extLst>
+          </p:cNvPr>
+          <p:cNvSpPr txBox="1"/>
+          <p:nvPr/>
+        </p:nvSpPr>
+        <p:spPr>
+          <a:xfrm>
+            <a:off x="5359061" y="4977806"/>
+            <a:ext cx="618104" cy="192118"/>
+          </a:xfrm>
+          <a:prstGeom prst="rect">
+            <a:avLst/>
+          </a:prstGeom>
+          <a:noFill/>
+        </p:spPr>
+        <p:txBody>
+          <a:bodyPr vert="horz" wrap="square" lIns="0" tIns="0" rIns="0" bIns="0" rtlCol="0">
+            <a:noAutofit/>
+          </a:bodyPr>
+          <a:lstStyle/>
+          <a:p>
+            <a:r>
+              <a:rPr lang="en-US" altLang="ko-KR" sz="600" b="1">
+                <a:solidFill>
+                  <a:srgbClr val="1F2937"/>
+                </a:solidFill>
+                <a:latin typeface="Malgun Gothic" panose="020B0503020000020004" pitchFamily="50" charset="-127"/>
+              </a:rPr>
+              <a:t>i_reset_n</a:t>
+            </a:r>
+            <a:endParaRPr lang="ko-KR" altLang="en-US" sz="600" b="1">
+              <a:solidFill>
+                <a:srgbClr val="1F2937"/>
+              </a:solidFill>
+              <a:latin typeface="Malgun Gothic" panose="020B0503020000020004" pitchFamily="50" charset="-127"/>
+            </a:endParaRPr>
+          </a:p>
+        </p:txBody>
+      </p:sp>
+      <p:sp>
+        <p:nvSpPr>
+          <p:cNvPr id="71" name="U_SPLIT_pin_i_data[8:0]">
+            <a:extLst>
+              <a:ext uri="{FF2B5EF4-FFF2-40B4-BE49-F238E27FC236}">
+                <a16:creationId xmlns:a16="http://schemas.microsoft.com/office/drawing/2014/main" id="{362DC062-A5AC-FF20-0EB6-23AA19506F13}"/>
+              </a:ext>
+            </a:extLst>
+          </p:cNvPr>
+          <p:cNvSpPr/>
+          <p:nvPr/>
+        </p:nvSpPr>
+        <p:spPr>
+          <a:xfrm>
+            <a:off x="5236403" y="4992736"/>
+            <a:ext cx="82414" cy="88083"/>
+          </a:xfrm>
+          <a:prstGeom prst="rect">
+            <a:avLst/>
+          </a:prstGeom>
+          <a:solidFill>
+            <a:srgbClr val="1D4ED8"/>
+          </a:solidFill>
+          <a:ln w="19050" cap="flat" cmpd="sng" algn="ctr">
+            <a:noFill/>
+            <a:prstDash val="solid"/>
+            <a:miter lim="800000"/>
+          </a:ln>
+          <a:effectLst/>
+        </p:spPr>
+        <p:style>
+          <a:lnRef idx="2">
+            <a:schemeClr val="accent1">
+              <a:shade val="15000"/>
+            </a:schemeClr>
+          </a:lnRef>
+          <a:fillRef idx="1">
+            <a:schemeClr val="accent1"/>
+          </a:fillRef>
+          <a:effectRef idx="0">
+            <a:schemeClr val="accent1"/>
+          </a:effectRef>
+          <a:fontRef idx="minor">
+            <a:schemeClr val="lt1"/>
+          </a:fontRef>
+        </p:style>
+        <p:txBody>
+          <a:bodyPr rtlCol="0" anchor="ctr"/>
+          <a:lstStyle/>
+          <a:p>
+            <a:pPr algn="ctr"/>
+            <a:endParaRPr lang="ko-KR" altLang="en-US" sz="1600"/>
+          </a:p>
+        </p:txBody>
+      </p:sp>
+      <p:cxnSp>
+        <p:nvCxnSpPr>
+          <p:cNvPr id="98" name="연결선: 꺾임 97">
+            <a:extLst>
+              <a:ext uri="{FF2B5EF4-FFF2-40B4-BE49-F238E27FC236}">
+                <a16:creationId xmlns:a16="http://schemas.microsoft.com/office/drawing/2014/main" id="{C1557BDA-53E8-DA5B-07E2-E0961214ACA3}"/>
+              </a:ext>
+            </a:extLst>
+          </p:cNvPr>
+          <p:cNvCxnSpPr>
+            <a:cxnSpLocks/>
+          </p:cNvCxnSpPr>
+          <p:nvPr/>
+        </p:nvCxnSpPr>
+        <p:spPr>
+          <a:xfrm rot="5400000" flipH="1" flipV="1">
+            <a:off x="5946028" y="3891693"/>
+            <a:ext cx="1653465" cy="598872"/>
+          </a:xfrm>
+          <a:prstGeom prst="bentConnector2">
+            <a:avLst/>
+          </a:prstGeom>
+          <a:ln w="31750">
+            <a:solidFill>
+              <a:srgbClr val="1E3A8A"/>
+            </a:solidFill>
+            <a:tailEnd type="triangle"/>
+          </a:ln>
+        </p:spPr>
+        <p:style>
+          <a:lnRef idx="2">
+            <a:schemeClr val="accent1"/>
+          </a:lnRef>
+          <a:fillRef idx="0">
+            <a:schemeClr val="accent1"/>
+          </a:fillRef>
+          <a:effectRef idx="1">
+            <a:schemeClr val="accent1"/>
+          </a:effectRef>
+          <a:fontRef idx="minor">
+            <a:schemeClr val="tx1"/>
+          </a:fontRef>
+        </p:style>
+      </p:cxnSp>
+      <p:cxnSp>
+        <p:nvCxnSpPr>
+          <p:cNvPr id="101" name="연결선: 꺾임 100">
+            <a:extLst>
+              <a:ext uri="{FF2B5EF4-FFF2-40B4-BE49-F238E27FC236}">
+                <a16:creationId xmlns:a16="http://schemas.microsoft.com/office/drawing/2014/main" id="{EB3D51B4-BE73-9ED4-82C8-321D36678004}"/>
+              </a:ext>
+            </a:extLst>
+          </p:cNvPr>
+          <p:cNvCxnSpPr>
+            <a:cxnSpLocks/>
+            <a:endCxn id="151" idx="1"/>
+          </p:cNvCxnSpPr>
+          <p:nvPr/>
+        </p:nvCxnSpPr>
+        <p:spPr>
+          <a:xfrm flipV="1">
+            <a:off x="4638391" y="3553521"/>
+            <a:ext cx="2429968" cy="1482649"/>
+          </a:xfrm>
+          <a:prstGeom prst="bentConnector3">
+            <a:avLst>
+              <a:gd name="adj1" fmla="val 9548"/>
+            </a:avLst>
+          </a:prstGeom>
+          <a:ln>
+            <a:tailEnd type="triangle"/>
+          </a:ln>
+        </p:spPr>
+        <p:style>
+          <a:lnRef idx="2">
+            <a:schemeClr val="accent1"/>
+          </a:lnRef>
+          <a:fillRef idx="0">
+            <a:schemeClr val="accent1"/>
+          </a:fillRef>
+          <a:effectRef idx="1">
+            <a:schemeClr val="accent1"/>
+          </a:effectRef>
+          <a:fontRef idx="minor">
+            <a:schemeClr val="tx1"/>
+          </a:fontRef>
+        </p:style>
+      </p:cxnSp>
+      <p:sp>
+        <p:nvSpPr>
+          <p:cNvPr id="106" name="TextBox 105">
+            <a:extLst>
+              <a:ext uri="{FF2B5EF4-FFF2-40B4-BE49-F238E27FC236}">
+                <a16:creationId xmlns:a16="http://schemas.microsoft.com/office/drawing/2014/main" id="{90B25C81-6083-773F-9442-CFB69AE5E107}"/>
+              </a:ext>
+            </a:extLst>
+          </p:cNvPr>
+          <p:cNvSpPr txBox="1"/>
+          <p:nvPr/>
+        </p:nvSpPr>
+        <p:spPr>
+          <a:xfrm>
+            <a:off x="4698972" y="1790974"/>
+            <a:ext cx="1376799" cy="276999"/>
+          </a:xfrm>
+          <a:prstGeom prst="rect">
+            <a:avLst/>
+          </a:prstGeom>
+          <a:noFill/>
+        </p:spPr>
+        <p:txBody>
+          <a:bodyPr vert="horz" wrap="square" lIns="0" tIns="0" rIns="0" bIns="0" rtlCol="0">
+            <a:noAutofit/>
+          </a:bodyPr>
+          <a:lstStyle/>
+          <a:p>
+            <a:r>
+              <a:rPr lang="en-US" altLang="ko-KR" sz="1001" b="1">
+                <a:latin typeface="Malgun Gothic" panose="020B0503020000020004" pitchFamily="50" charset="-127"/>
+              </a:rPr>
+              <a:t>FND_CONTROLLER</a:t>
+            </a:r>
+            <a:endParaRPr lang="ko-KR" altLang="en-US" sz="1001" b="1">
+              <a:latin typeface="Malgun Gothic" panose="020B0503020000020004" pitchFamily="50" charset="-127"/>
+            </a:endParaRPr>
+          </a:p>
+        </p:txBody>
+      </p:sp>
+      <p:sp>
+        <p:nvSpPr>
+          <p:cNvPr id="114" name="TextBox 113">
+            <a:extLst>
+              <a:ext uri="{FF2B5EF4-FFF2-40B4-BE49-F238E27FC236}">
+                <a16:creationId xmlns:a16="http://schemas.microsoft.com/office/drawing/2014/main" id="{A6F33A03-4001-8AF6-4973-C112C046BC5E}"/>
+              </a:ext>
+            </a:extLst>
+          </p:cNvPr>
+          <p:cNvSpPr txBox="1"/>
+          <p:nvPr/>
+        </p:nvSpPr>
+        <p:spPr>
+          <a:xfrm>
+            <a:off x="1353359" y="909225"/>
+            <a:ext cx="1344121" cy="276999"/>
+          </a:xfrm>
+          <a:prstGeom prst="rect">
+            <a:avLst/>
+          </a:prstGeom>
+          <a:noFill/>
+        </p:spPr>
+        <p:txBody>
+          <a:bodyPr vert="horz" wrap="square" lIns="0" tIns="0" rIns="0" bIns="0" rtlCol="0">
+            <a:noAutofit/>
+          </a:bodyPr>
+          <a:lstStyle/>
+          <a:p>
+            <a:r>
+              <a:rPr lang="en-US" altLang="ko-KR" sz="1200" b="1">
+                <a:solidFill>
+                  <a:srgbClr val="1F2937"/>
+                </a:solidFill>
+                <a:latin typeface="Malgun Gothic" panose="020B0503020000020004" pitchFamily="50" charset="-127"/>
+              </a:rPr>
+              <a:t>‘Counter_10000’</a:t>
+            </a:r>
+            <a:endParaRPr lang="ko-KR" altLang="en-US" sz="1200" b="1">
+              <a:solidFill>
+                <a:srgbClr val="1F2937"/>
+              </a:solidFill>
+              <a:latin typeface="Malgun Gothic" panose="020B0503020000020004" pitchFamily="50" charset="-127"/>
+            </a:endParaRPr>
+          </a:p>
+        </p:txBody>
+      </p:sp>
+      <p:sp>
+        <p:nvSpPr>
+          <p:cNvPr id="128" name="top_frame">
+            <a:extLst>
+              <a:ext uri="{FF2B5EF4-FFF2-40B4-BE49-F238E27FC236}">
+                <a16:creationId xmlns:a16="http://schemas.microsoft.com/office/drawing/2014/main" id="{3C0BE5C8-429E-A5AE-6499-B37B096076EC}"/>
+              </a:ext>
+            </a:extLst>
+          </p:cNvPr>
+          <p:cNvSpPr/>
+          <p:nvPr/>
+        </p:nvSpPr>
+        <p:spPr>
+          <a:xfrm>
+            <a:off x="1542906" y="1826873"/>
+            <a:ext cx="3002080" cy="2364256"/>
+          </a:xfrm>
+          <a:prstGeom prst="roundRect">
+            <a:avLst>
+              <a:gd name="adj" fmla="val 2000"/>
+            </a:avLst>
+          </a:prstGeom>
+          <a:solidFill>
+            <a:schemeClr val="accent1">
+              <a:alpha val="9000"/>
+            </a:schemeClr>
+          </a:solidFill>
+          <a:ln w="12700" cap="flat" cmpd="sng" algn="ctr">
+            <a:solidFill>
+              <a:srgbClr val="9CA3AF"/>
+            </a:solidFill>
+            <a:prstDash val="dash"/>
+            <a:miter lim="800000"/>
+          </a:ln>
+          <a:effectLst/>
+        </p:spPr>
+        <p:style>
+          <a:lnRef idx="2">
+            <a:schemeClr val="accent1">
+              <a:shade val="15000"/>
+            </a:schemeClr>
+          </a:lnRef>
+          <a:fillRef idx="1">
+            <a:schemeClr val="accent1"/>
+          </a:fillRef>
+          <a:effectRef idx="0">
+            <a:schemeClr val="accent1"/>
+          </a:effectRef>
+          <a:fontRef idx="minor">
+            <a:schemeClr val="lt1"/>
+          </a:fontRef>
+        </p:style>
+        <p:txBody>
+          <a:bodyPr rtlCol="0" anchor="ctr"/>
+          <a:lstStyle/>
+          <a:p>
+            <a:pPr algn="ctr"/>
+            <a:endParaRPr lang="ko-KR" altLang="en-US" sz="1600"/>
+          </a:p>
+        </p:txBody>
+      </p:sp>
+      <p:grpSp>
+        <p:nvGrpSpPr>
+          <p:cNvPr id="129" name="lib_dec">
+            <a:extLst>
+              <a:ext uri="{FF2B5EF4-FFF2-40B4-BE49-F238E27FC236}">
+                <a16:creationId xmlns:a16="http://schemas.microsoft.com/office/drawing/2014/main" id="{9EB05DFF-F9C2-0E91-EE3F-E5B2EA6C04F2}"/>
+              </a:ext>
+            </a:extLst>
+          </p:cNvPr>
+          <p:cNvGrpSpPr/>
+          <p:nvPr/>
+        </p:nvGrpSpPr>
+        <p:grpSpPr>
+          <a:xfrm>
+            <a:off x="1590787" y="2256221"/>
+            <a:ext cx="1186180" cy="1564000"/>
+            <a:chOff x="6731000" y="1270000"/>
+            <a:chExt cx="1186180" cy="1564000"/>
+          </a:xfrm>
+        </p:grpSpPr>
+        <p:sp>
+          <p:nvSpPr>
+            <p:cNvPr id="130" name="lib_dec_body">
+              <a:extLst>
+                <a:ext uri="{FF2B5EF4-FFF2-40B4-BE49-F238E27FC236}">
+                  <a16:creationId xmlns:a16="http://schemas.microsoft.com/office/drawing/2014/main" id="{156E3F90-5D71-ABA2-E72A-84D89105F733}"/>
+                </a:ext>
+              </a:extLst>
+            </p:cNvPr>
+            <p:cNvSpPr/>
+            <p:nvPr/>
+          </p:nvSpPr>
+          <p:spPr>
+            <a:xfrm>
+              <a:off x="6858000" y="1270000"/>
+              <a:ext cx="819730" cy="1564000"/>
+            </a:xfrm>
+            <a:prstGeom prst="roundRect">
+              <a:avLst>
+                <a:gd name="adj" fmla="val 6000"/>
+              </a:avLst>
+            </a:prstGeom>
+            <a:solidFill>
+              <a:srgbClr val="FEF2F2"/>
+            </a:solidFill>
+            <a:ln w="19050">
+              <a:solidFill>
+                <a:srgbClr val="B91C1C"/>
+              </a:solidFill>
+            </a:ln>
+          </p:spPr>
+          <p:style>
+            <a:lnRef idx="2">
+              <a:schemeClr val="accent1">
+                <a:shade val="15000"/>
+              </a:schemeClr>
+            </a:lnRef>
+            <a:fillRef idx="1">
+              <a:schemeClr val="accent1"/>
+            </a:fillRef>
+            <a:effectRef idx="0">
+              <a:schemeClr val="accent1"/>
+            </a:effectRef>
+            <a:fontRef idx="minor">
+              <a:schemeClr val="lt1"/>
+            </a:fontRef>
+          </p:style>
+          <p:txBody>
+            <a:bodyPr lIns="25401" tIns="38100" rIns="25401" rtlCol="0" anchor="t"/>
+            <a:lstStyle/>
+            <a:p>
+              <a:pPr algn="ctr"/>
+              <a:endParaRPr lang="en-US" altLang="ko-KR" sz="1001" b="1">
+                <a:solidFill>
+                  <a:srgbClr val="B91C1C"/>
+                </a:solidFill>
+                <a:latin typeface="Malgun Gothic" panose="020B0503020000020004" pitchFamily="50" charset="-127"/>
+              </a:endParaRPr>
+            </a:p>
+          </p:txBody>
+        </p:sp>
+        <p:sp>
+          <p:nvSpPr>
+            <p:cNvPr id="131" name="lib_dec_pin_i_sel[1:0]">
+              <a:extLst>
+                <a:ext uri="{FF2B5EF4-FFF2-40B4-BE49-F238E27FC236}">
+                  <a16:creationId xmlns:a16="http://schemas.microsoft.com/office/drawing/2014/main" id="{2491E474-44B5-53A2-9D3A-0BA9E86C525F}"/>
+                </a:ext>
+              </a:extLst>
+            </p:cNvPr>
+            <p:cNvSpPr/>
+            <p:nvPr/>
+          </p:nvSpPr>
+          <p:spPr>
+            <a:xfrm>
+              <a:off x="6731000" y="2258060"/>
+              <a:ext cx="127000" cy="127000"/>
+            </a:xfrm>
+            <a:prstGeom prst="rect">
+              <a:avLst/>
+            </a:prstGeom>
+            <a:solidFill>
+              <a:srgbClr val="1D4ED8"/>
+            </a:solidFill>
+            <a:ln w="19050" cap="flat" cmpd="sng" algn="ctr">
+              <a:noFill/>
+              <a:prstDash val="solid"/>
+              <a:miter lim="800000"/>
+            </a:ln>
+            <a:effectLst/>
+          </p:spPr>
+          <p:style>
+            <a:lnRef idx="2">
+              <a:schemeClr val="accent1">
+                <a:shade val="15000"/>
+              </a:schemeClr>
+            </a:lnRef>
+            <a:fillRef idx="1">
+              <a:schemeClr val="accent1"/>
+            </a:fillRef>
+            <a:effectRef idx="0">
+              <a:schemeClr val="accent1"/>
+            </a:effectRef>
+            <a:fontRef idx="minor">
+              <a:schemeClr val="lt1"/>
+            </a:fontRef>
+          </p:style>
+          <p:txBody>
+            <a:bodyPr rtlCol="0" anchor="ctr"/>
+            <a:lstStyle/>
+            <a:p>
+              <a:pPr algn="ctr"/>
+              <a:endParaRPr lang="ko-KR" altLang="en-US" sz="1801"/>
+            </a:p>
+          </p:txBody>
+        </p:sp>
+        <p:sp>
+          <p:nvSpPr>
+            <p:cNvPr id="132" name="lib_dec_lbl_i_sel[1:0]">
+              <a:extLst>
+                <a:ext uri="{FF2B5EF4-FFF2-40B4-BE49-F238E27FC236}">
+                  <a16:creationId xmlns:a16="http://schemas.microsoft.com/office/drawing/2014/main" id="{93DBDBCF-A13F-44FD-8E0E-18EB8B50971D}"/>
+                </a:ext>
+              </a:extLst>
+            </p:cNvPr>
+            <p:cNvSpPr txBox="1"/>
+            <p:nvPr/>
+          </p:nvSpPr>
+          <p:spPr>
+            <a:xfrm>
+              <a:off x="6887088" y="2249936"/>
+              <a:ext cx="1016000" cy="276999"/>
+            </a:xfrm>
+            <a:prstGeom prst="rect">
+              <a:avLst/>
+            </a:prstGeom>
+            <a:noFill/>
+          </p:spPr>
+          <p:txBody>
+            <a:bodyPr vert="horz" wrap="square" lIns="0" tIns="0" rIns="0" bIns="0" rtlCol="0">
+              <a:noAutofit/>
+            </a:bodyPr>
+            <a:lstStyle/>
+            <a:p>
+              <a:r>
+                <a:rPr lang="en-US" altLang="ko-KR" sz="800" b="1">
+                  <a:solidFill>
+                    <a:srgbClr val="1F2937"/>
+                  </a:solidFill>
+                  <a:latin typeface="Malgun Gothic" panose="020B0503020000020004" pitchFamily="50" charset="-127"/>
+                </a:rPr>
+                <a:t>i_clk</a:t>
+              </a:r>
+              <a:endParaRPr lang="ko-KR" altLang="en-US" sz="800" b="1">
+                <a:solidFill>
+                  <a:srgbClr val="1F2937"/>
+                </a:solidFill>
+                <a:latin typeface="Malgun Gothic" panose="020B0503020000020004" pitchFamily="50" charset="-127"/>
+              </a:endParaRPr>
+            </a:p>
+          </p:txBody>
+        </p:sp>
+        <p:sp>
+          <p:nvSpPr>
+            <p:cNvPr id="133" name="lib_dec_pin_o_dec_n[3:0]">
+              <a:extLst>
+                <a:ext uri="{FF2B5EF4-FFF2-40B4-BE49-F238E27FC236}">
+                  <a16:creationId xmlns:a16="http://schemas.microsoft.com/office/drawing/2014/main" id="{81B03ADB-5272-BD01-CDB6-F2C72289046A}"/>
+                </a:ext>
+              </a:extLst>
+            </p:cNvPr>
+            <p:cNvSpPr/>
+            <p:nvPr/>
+          </p:nvSpPr>
+          <p:spPr>
+            <a:xfrm>
+              <a:off x="7674265" y="2469740"/>
+              <a:ext cx="127000" cy="127000"/>
+            </a:xfrm>
+            <a:prstGeom prst="rect">
+              <a:avLst/>
+            </a:prstGeom>
+            <a:solidFill>
+              <a:srgbClr val="15803D"/>
+            </a:solidFill>
+            <a:ln w="19050" cap="flat" cmpd="sng" algn="ctr">
+              <a:noFill/>
+              <a:prstDash val="solid"/>
+              <a:miter lim="800000"/>
+            </a:ln>
+            <a:effectLst/>
+          </p:spPr>
+          <p:style>
+            <a:lnRef idx="2">
+              <a:schemeClr val="accent1">
+                <a:shade val="15000"/>
+              </a:schemeClr>
+            </a:lnRef>
+            <a:fillRef idx="1">
+              <a:schemeClr val="accent1"/>
+            </a:fillRef>
+            <a:effectRef idx="0">
+              <a:schemeClr val="accent1"/>
+            </a:effectRef>
+            <a:fontRef idx="minor">
+              <a:schemeClr val="lt1"/>
+            </a:fontRef>
+          </p:style>
+          <p:txBody>
+            <a:bodyPr rtlCol="0" anchor="ctr"/>
+            <a:lstStyle/>
+            <a:p>
+              <a:pPr algn="ctr"/>
+              <a:endParaRPr lang="ko-KR" altLang="en-US" sz="1801"/>
+            </a:p>
+          </p:txBody>
+        </p:sp>
+        <p:sp>
+          <p:nvSpPr>
+            <p:cNvPr id="168" name="lib_dec_pin_i_sel[1:0]">
+              <a:extLst>
+                <a:ext uri="{FF2B5EF4-FFF2-40B4-BE49-F238E27FC236}">
+                  <a16:creationId xmlns:a16="http://schemas.microsoft.com/office/drawing/2014/main" id="{234F7BA1-D973-EC3C-2182-E6E580401986}"/>
+                </a:ext>
+              </a:extLst>
+            </p:cNvPr>
+            <p:cNvSpPr/>
+            <p:nvPr/>
+          </p:nvSpPr>
+          <p:spPr>
+            <a:xfrm>
+              <a:off x="6731000" y="2518533"/>
+              <a:ext cx="127000" cy="127000"/>
+            </a:xfrm>
+            <a:prstGeom prst="rect">
+              <a:avLst/>
+            </a:prstGeom>
+            <a:solidFill>
+              <a:srgbClr val="1D4ED8"/>
+            </a:solidFill>
+            <a:ln w="19050" cap="flat" cmpd="sng" algn="ctr">
+              <a:noFill/>
+              <a:prstDash val="solid"/>
+              <a:miter lim="800000"/>
+            </a:ln>
+            <a:effectLst/>
+          </p:spPr>
+          <p:style>
+            <a:lnRef idx="2">
+              <a:schemeClr val="accent1">
+                <a:shade val="15000"/>
+              </a:schemeClr>
+            </a:lnRef>
+            <a:fillRef idx="1">
+              <a:schemeClr val="accent1"/>
+            </a:fillRef>
+            <a:effectRef idx="0">
+              <a:schemeClr val="accent1"/>
+            </a:effectRef>
+            <a:fontRef idx="minor">
+              <a:schemeClr val="lt1"/>
+            </a:fontRef>
+          </p:style>
+          <p:txBody>
+            <a:bodyPr rtlCol="0" anchor="ctr"/>
+            <a:lstStyle/>
+            <a:p>
+              <a:pPr algn="ctr"/>
+              <a:endParaRPr lang="ko-KR" altLang="en-US" sz="1801"/>
+            </a:p>
+          </p:txBody>
+        </p:sp>
+        <p:sp>
+          <p:nvSpPr>
+            <p:cNvPr id="173" name="lib_dec_lbl_i_sel[1:0]">
+              <a:extLst>
+                <a:ext uri="{FF2B5EF4-FFF2-40B4-BE49-F238E27FC236}">
+                  <a16:creationId xmlns:a16="http://schemas.microsoft.com/office/drawing/2014/main" id="{69E7B222-8E8E-F792-3283-DC71A639528B}"/>
+                </a:ext>
+              </a:extLst>
+            </p:cNvPr>
+            <p:cNvSpPr txBox="1"/>
+            <p:nvPr/>
+          </p:nvSpPr>
+          <p:spPr>
+            <a:xfrm>
+              <a:off x="6901180" y="2492417"/>
+              <a:ext cx="1016000" cy="276999"/>
+            </a:xfrm>
+            <a:prstGeom prst="rect">
+              <a:avLst/>
+            </a:prstGeom>
+            <a:noFill/>
+          </p:spPr>
+          <p:txBody>
+            <a:bodyPr vert="horz" wrap="square" lIns="0" tIns="0" rIns="0" bIns="0" rtlCol="0">
+              <a:noAutofit/>
+            </a:bodyPr>
+            <a:lstStyle/>
+            <a:p>
+              <a:r>
+                <a:rPr lang="en-US" altLang="ko-KR" sz="800" b="1">
+                  <a:solidFill>
+                    <a:srgbClr val="1F2937"/>
+                  </a:solidFill>
+                  <a:latin typeface="Malgun Gothic" panose="020B0503020000020004" pitchFamily="50" charset="-127"/>
+                </a:rPr>
+                <a:t>i_reset</a:t>
+              </a:r>
+              <a:endParaRPr lang="ko-KR" altLang="en-US" sz="800" b="1">
+                <a:solidFill>
+                  <a:srgbClr val="1F2937"/>
+                </a:solidFill>
+                <a:latin typeface="Malgun Gothic" panose="020B0503020000020004" pitchFamily="50" charset="-127"/>
+              </a:endParaRPr>
+            </a:p>
+          </p:txBody>
+        </p:sp>
+      </p:grpSp>
+      <p:grpSp>
+        <p:nvGrpSpPr>
+          <p:cNvPr id="135" name="lib_dec">
+            <a:extLst>
+              <a:ext uri="{FF2B5EF4-FFF2-40B4-BE49-F238E27FC236}">
+                <a16:creationId xmlns:a16="http://schemas.microsoft.com/office/drawing/2014/main" id="{27006872-2317-3911-CD08-16563062031D}"/>
+              </a:ext>
+            </a:extLst>
+          </p:cNvPr>
+          <p:cNvGrpSpPr/>
+          <p:nvPr/>
+        </p:nvGrpSpPr>
+        <p:grpSpPr>
+          <a:xfrm>
+            <a:off x="3069052" y="2279601"/>
+            <a:ext cx="1068975" cy="1564000"/>
+            <a:chOff x="6739910" y="1270000"/>
+            <a:chExt cx="1068975" cy="1564000"/>
+          </a:xfrm>
+        </p:grpSpPr>
+        <p:sp>
+          <p:nvSpPr>
+            <p:cNvPr id="144" name="lib_dec_body">
+              <a:extLst>
+                <a:ext uri="{FF2B5EF4-FFF2-40B4-BE49-F238E27FC236}">
+                  <a16:creationId xmlns:a16="http://schemas.microsoft.com/office/drawing/2014/main" id="{0F67CA00-84AA-222B-0A21-2B7BFAC62CC5}"/>
+                </a:ext>
+              </a:extLst>
+            </p:cNvPr>
+            <p:cNvSpPr/>
+            <p:nvPr/>
+          </p:nvSpPr>
+          <p:spPr>
+            <a:xfrm>
+              <a:off x="6858000" y="1270000"/>
+              <a:ext cx="819730" cy="1564000"/>
+            </a:xfrm>
+            <a:prstGeom prst="roundRect">
+              <a:avLst>
+                <a:gd name="adj" fmla="val 6000"/>
+              </a:avLst>
+            </a:prstGeom>
+            <a:solidFill>
+              <a:srgbClr val="FEF2F2"/>
+            </a:solidFill>
+            <a:ln w="19050">
+              <a:solidFill>
+                <a:srgbClr val="B91C1C"/>
+              </a:solidFill>
+            </a:ln>
+          </p:spPr>
+          <p:style>
+            <a:lnRef idx="2">
+              <a:schemeClr val="accent1">
+                <a:shade val="15000"/>
+              </a:schemeClr>
+            </a:lnRef>
+            <a:fillRef idx="1">
+              <a:schemeClr val="accent1"/>
+            </a:fillRef>
+            <a:effectRef idx="0">
+              <a:schemeClr val="accent1"/>
+            </a:effectRef>
+            <a:fontRef idx="minor">
+              <a:schemeClr val="lt1"/>
+            </a:fontRef>
+          </p:style>
+          <p:txBody>
+            <a:bodyPr lIns="25401" tIns="38100" rIns="25401" rtlCol="0" anchor="t"/>
+            <a:lstStyle/>
+            <a:p>
+              <a:pPr algn="ctr"/>
+              <a:endParaRPr lang="en-US" altLang="ko-KR" sz="1001" b="1">
+                <a:solidFill>
+                  <a:srgbClr val="B91C1C"/>
+                </a:solidFill>
+                <a:latin typeface="Malgun Gothic" panose="020B0503020000020004" pitchFamily="50" charset="-127"/>
+              </a:endParaRPr>
+            </a:p>
+          </p:txBody>
+        </p:sp>
+        <p:sp>
+          <p:nvSpPr>
+            <p:cNvPr id="146" name="lib_dec_pin_i_sel[1:0]">
+              <a:extLst>
+                <a:ext uri="{FF2B5EF4-FFF2-40B4-BE49-F238E27FC236}">
+                  <a16:creationId xmlns:a16="http://schemas.microsoft.com/office/drawing/2014/main" id="{F7966D17-04C0-876D-5E21-23C8F009F53D}"/>
+                </a:ext>
+              </a:extLst>
+            </p:cNvPr>
+            <p:cNvSpPr/>
+            <p:nvPr/>
+          </p:nvSpPr>
+          <p:spPr>
+            <a:xfrm>
+              <a:off x="6739910" y="2447061"/>
+              <a:ext cx="127000" cy="127000"/>
+            </a:xfrm>
+            <a:prstGeom prst="rect">
+              <a:avLst/>
+            </a:prstGeom>
+            <a:solidFill>
+              <a:srgbClr val="1D4ED8"/>
+            </a:solidFill>
+            <a:ln w="19050" cap="flat" cmpd="sng" algn="ctr">
+              <a:noFill/>
+              <a:prstDash val="solid"/>
+              <a:miter lim="800000"/>
+            </a:ln>
+            <a:effectLst/>
+          </p:spPr>
+          <p:style>
+            <a:lnRef idx="2">
+              <a:schemeClr val="accent1">
+                <a:shade val="15000"/>
+              </a:schemeClr>
+            </a:lnRef>
+            <a:fillRef idx="1">
+              <a:schemeClr val="accent1"/>
+            </a:fillRef>
+            <a:effectRef idx="0">
+              <a:schemeClr val="accent1"/>
+            </a:effectRef>
+            <a:fontRef idx="minor">
+              <a:schemeClr val="lt1"/>
+            </a:fontRef>
+          </p:style>
+          <p:txBody>
+            <a:bodyPr rtlCol="0" anchor="ctr"/>
+            <a:lstStyle/>
+            <a:p>
+              <a:pPr algn="ctr"/>
+              <a:endParaRPr lang="ko-KR" altLang="en-US" sz="1801"/>
+            </a:p>
+          </p:txBody>
+        </p:sp>
+        <p:sp>
+          <p:nvSpPr>
+            <p:cNvPr id="147" name="lib_dec_lbl_i_sel[1:0]">
+              <a:extLst>
+                <a:ext uri="{FF2B5EF4-FFF2-40B4-BE49-F238E27FC236}">
+                  <a16:creationId xmlns:a16="http://schemas.microsoft.com/office/drawing/2014/main" id="{642E380B-D84B-8140-24AA-19BEDACD9541}"/>
+                </a:ext>
+              </a:extLst>
+            </p:cNvPr>
+            <p:cNvSpPr txBox="1"/>
+            <p:nvPr/>
+          </p:nvSpPr>
+          <p:spPr>
+            <a:xfrm>
+              <a:off x="6921454" y="2455322"/>
+              <a:ext cx="468081" cy="276999"/>
+            </a:xfrm>
+            <a:prstGeom prst="rect">
+              <a:avLst/>
+            </a:prstGeom>
+            <a:noFill/>
+          </p:spPr>
+          <p:txBody>
+            <a:bodyPr vert="horz" wrap="square" lIns="0" tIns="0" rIns="0" bIns="0" rtlCol="0">
+              <a:noAutofit/>
+            </a:bodyPr>
+            <a:lstStyle/>
+            <a:p>
+              <a:r>
+                <a:rPr lang="en-US" altLang="ko-KR" sz="800" b="1">
+                  <a:solidFill>
+                    <a:srgbClr val="1F2937"/>
+                  </a:solidFill>
+                  <a:latin typeface="Malgun Gothic" panose="020B0503020000020004" pitchFamily="50" charset="-127"/>
+                </a:rPr>
+                <a:t>i_sel[1:0]</a:t>
+              </a:r>
+              <a:endParaRPr lang="ko-KR" altLang="en-US" sz="800" b="1">
+                <a:solidFill>
+                  <a:srgbClr val="1F2937"/>
+                </a:solidFill>
+                <a:latin typeface="Malgun Gothic" panose="020B0503020000020004" pitchFamily="50" charset="-127"/>
+              </a:endParaRPr>
+            </a:p>
+          </p:txBody>
+        </p:sp>
+        <p:sp>
+          <p:nvSpPr>
+            <p:cNvPr id="148" name="lib_dec_pin_o_dec_n[3:0]">
+              <a:extLst>
+                <a:ext uri="{FF2B5EF4-FFF2-40B4-BE49-F238E27FC236}">
+                  <a16:creationId xmlns:a16="http://schemas.microsoft.com/office/drawing/2014/main" id="{CE03AB28-733F-609F-5B84-C6538982AFA7}"/>
+                </a:ext>
+              </a:extLst>
+            </p:cNvPr>
+            <p:cNvSpPr/>
+            <p:nvPr/>
+          </p:nvSpPr>
+          <p:spPr>
+            <a:xfrm>
+              <a:off x="7681885" y="1532480"/>
+              <a:ext cx="127000" cy="127000"/>
+            </a:xfrm>
+            <a:prstGeom prst="rect">
+              <a:avLst/>
+            </a:prstGeom>
+            <a:solidFill>
+              <a:srgbClr val="15803D"/>
+            </a:solidFill>
+            <a:ln w="19050" cap="flat" cmpd="sng" algn="ctr">
+              <a:noFill/>
+              <a:prstDash val="solid"/>
+              <a:miter lim="800000"/>
+            </a:ln>
+            <a:effectLst/>
+          </p:spPr>
+          <p:style>
+            <a:lnRef idx="2">
+              <a:schemeClr val="accent1">
+                <a:shade val="15000"/>
+              </a:schemeClr>
+            </a:lnRef>
+            <a:fillRef idx="1">
+              <a:schemeClr val="accent1"/>
+            </a:fillRef>
+            <a:effectRef idx="0">
+              <a:schemeClr val="accent1"/>
+            </a:effectRef>
+            <a:fontRef idx="minor">
+              <a:schemeClr val="lt1"/>
+            </a:fontRef>
+          </p:style>
+          <p:txBody>
+            <a:bodyPr rtlCol="0" anchor="ctr"/>
+            <a:lstStyle/>
+            <a:p>
+              <a:pPr algn="ctr"/>
+              <a:endParaRPr lang="ko-KR" altLang="en-US" sz="1801"/>
+            </a:p>
+          </p:txBody>
+        </p:sp>
+        <p:sp>
+          <p:nvSpPr>
+            <p:cNvPr id="207" name="lib_dec_pin_i_sel[1:0]">
+              <a:extLst>
+                <a:ext uri="{FF2B5EF4-FFF2-40B4-BE49-F238E27FC236}">
+                  <a16:creationId xmlns:a16="http://schemas.microsoft.com/office/drawing/2014/main" id="{5FF4652B-0598-8D42-7CD0-ECDB2A6EB728}"/>
+                </a:ext>
+              </a:extLst>
+            </p:cNvPr>
+            <p:cNvSpPr/>
+            <p:nvPr/>
+          </p:nvSpPr>
+          <p:spPr>
+            <a:xfrm>
+              <a:off x="6739910" y="2668821"/>
+              <a:ext cx="127000" cy="127000"/>
+            </a:xfrm>
+            <a:prstGeom prst="rect">
+              <a:avLst/>
+            </a:prstGeom>
+            <a:solidFill>
+              <a:srgbClr val="1D4ED8"/>
+            </a:solidFill>
+            <a:ln w="19050" cap="flat" cmpd="sng" algn="ctr">
+              <a:noFill/>
+              <a:prstDash val="solid"/>
+              <a:miter lim="800000"/>
+            </a:ln>
+            <a:effectLst/>
+          </p:spPr>
+          <p:style>
+            <a:lnRef idx="2">
+              <a:schemeClr val="accent1">
+                <a:shade val="15000"/>
+              </a:schemeClr>
+            </a:lnRef>
+            <a:fillRef idx="1">
+              <a:schemeClr val="accent1"/>
+            </a:fillRef>
+            <a:effectRef idx="0">
+              <a:schemeClr val="accent1"/>
+            </a:effectRef>
+            <a:fontRef idx="minor">
+              <a:schemeClr val="lt1"/>
+            </a:fontRef>
+          </p:style>
+          <p:txBody>
+            <a:bodyPr rtlCol="0" anchor="ctr"/>
+            <a:lstStyle/>
+            <a:p>
+              <a:pPr algn="ctr"/>
+              <a:endParaRPr lang="ko-KR" altLang="en-US" sz="1801"/>
+            </a:p>
+          </p:txBody>
+        </p:sp>
+      </p:grpSp>
+      <p:sp>
+        <p:nvSpPr>
+          <p:cNvPr id="152" name="lib_dec_lbl_i_sel[1:0]">
+            <a:extLst>
+              <a:ext uri="{FF2B5EF4-FFF2-40B4-BE49-F238E27FC236}">
+                <a16:creationId xmlns:a16="http://schemas.microsoft.com/office/drawing/2014/main" id="{3E26429F-4540-B81F-1EA9-82E2229C21D3}"/>
+              </a:ext>
+            </a:extLst>
+          </p:cNvPr>
+          <p:cNvSpPr txBox="1"/>
+          <p:nvPr/>
+        </p:nvSpPr>
+        <p:spPr>
+          <a:xfrm>
+            <a:off x="3274017" y="2546639"/>
+            <a:ext cx="777574" cy="276999"/>
+          </a:xfrm>
+          <a:prstGeom prst="rect">
+            <a:avLst/>
+          </a:prstGeom>
+          <a:noFill/>
+        </p:spPr>
+        <p:txBody>
+          <a:bodyPr vert="horz" wrap="square" lIns="0" tIns="0" rIns="0" bIns="0" rtlCol="0">
+            <a:noAutofit/>
+          </a:bodyPr>
+          <a:lstStyle/>
+          <a:p>
+            <a:r>
+              <a:rPr lang="en-US" altLang="ko-KR" sz="700" b="1">
+                <a:solidFill>
+                  <a:srgbClr val="1F2937"/>
+                </a:solidFill>
+                <a:latin typeface="Malgun Gothic" panose="020B0503020000020004" pitchFamily="50" charset="-127"/>
+              </a:rPr>
+              <a:t>[13:0]o_counter</a:t>
+            </a:r>
+            <a:endParaRPr lang="ko-KR" altLang="en-US" sz="700" b="1">
+              <a:solidFill>
+                <a:srgbClr val="1F2937"/>
+              </a:solidFill>
+              <a:latin typeface="Malgun Gothic" panose="020B0503020000020004" pitchFamily="50" charset="-127"/>
+            </a:endParaRPr>
+          </a:p>
+        </p:txBody>
+      </p:sp>
+      <p:sp>
+        <p:nvSpPr>
+          <p:cNvPr id="158" name="TextBox 157">
+            <a:extLst>
+              <a:ext uri="{FF2B5EF4-FFF2-40B4-BE49-F238E27FC236}">
+                <a16:creationId xmlns:a16="http://schemas.microsoft.com/office/drawing/2014/main" id="{EED1BC3D-318C-25B9-18E7-81506A89B55B}"/>
+              </a:ext>
+            </a:extLst>
+          </p:cNvPr>
+          <p:cNvSpPr txBox="1"/>
+          <p:nvPr/>
+        </p:nvSpPr>
+        <p:spPr>
+          <a:xfrm>
+            <a:off x="1555774" y="1847655"/>
+            <a:ext cx="1376799" cy="276999"/>
+          </a:xfrm>
+          <a:prstGeom prst="rect">
+            <a:avLst/>
+          </a:prstGeom>
+          <a:noFill/>
+        </p:spPr>
+        <p:txBody>
+          <a:bodyPr vert="horz" wrap="square" lIns="0" tIns="0" rIns="0" bIns="0" rtlCol="0">
+            <a:noAutofit/>
+          </a:bodyPr>
+          <a:lstStyle/>
+          <a:p>
+            <a:r>
+              <a:rPr lang="en-US" altLang="ko-KR" sz="1001" b="1">
+                <a:latin typeface="Malgun Gothic" panose="020B0503020000020004" pitchFamily="50" charset="-127"/>
+              </a:rPr>
+              <a:t>Counter_datapath</a:t>
+            </a:r>
+            <a:endParaRPr lang="ko-KR" altLang="en-US" sz="1001" b="1">
+              <a:latin typeface="Malgun Gothic" panose="020B0503020000020004" pitchFamily="50" charset="-127"/>
+            </a:endParaRPr>
+          </a:p>
+        </p:txBody>
+      </p:sp>
+      <p:cxnSp>
+        <p:nvCxnSpPr>
+          <p:cNvPr id="160" name="연결선: 꺾임 159">
+            <a:extLst>
+              <a:ext uri="{FF2B5EF4-FFF2-40B4-BE49-F238E27FC236}">
+                <a16:creationId xmlns:a16="http://schemas.microsoft.com/office/drawing/2014/main" id="{E01D941A-04E4-104C-282D-AC8DF60475B6}"/>
+              </a:ext>
+            </a:extLst>
+          </p:cNvPr>
+          <p:cNvCxnSpPr>
+            <a:cxnSpLocks/>
+            <a:endCxn id="146" idx="1"/>
+          </p:cNvCxnSpPr>
+          <p:nvPr/>
+        </p:nvCxnSpPr>
+        <p:spPr>
+          <a:xfrm flipV="1">
+            <a:off x="2663034" y="3520162"/>
+            <a:ext cx="406018" cy="4093"/>
+          </a:xfrm>
+          <a:prstGeom prst="bentConnector3">
+            <a:avLst>
+              <a:gd name="adj1" fmla="val 50000"/>
+            </a:avLst>
+          </a:prstGeom>
+          <a:ln w="31750">
+            <a:solidFill>
+              <a:srgbClr val="1E3A8A"/>
+            </a:solidFill>
+            <a:tailEnd type="triangle"/>
+          </a:ln>
+        </p:spPr>
+        <p:style>
+          <a:lnRef idx="2">
+            <a:schemeClr val="accent1"/>
+          </a:lnRef>
+          <a:fillRef idx="0">
+            <a:schemeClr val="accent1"/>
+          </a:fillRef>
+          <a:effectRef idx="1">
+            <a:schemeClr val="accent1"/>
+          </a:effectRef>
+          <a:fontRef idx="minor">
+            <a:schemeClr val="tx1"/>
+          </a:fontRef>
+        </p:style>
+      </p:cxnSp>
+      <p:cxnSp>
+        <p:nvCxnSpPr>
+          <p:cNvPr id="166" name="연결선: 꺾임 165">
+            <a:extLst>
+              <a:ext uri="{FF2B5EF4-FFF2-40B4-BE49-F238E27FC236}">
+                <a16:creationId xmlns:a16="http://schemas.microsoft.com/office/drawing/2014/main" id="{0CCD5ABD-3E05-728D-835B-01B61AF71BAD}"/>
+              </a:ext>
+            </a:extLst>
+          </p:cNvPr>
+          <p:cNvCxnSpPr>
+            <a:cxnSpLocks/>
+            <a:endCxn id="168" idx="1"/>
+          </p:cNvCxnSpPr>
+          <p:nvPr/>
+        </p:nvCxnSpPr>
+        <p:spPr>
+          <a:xfrm rot="5400000" flipH="1" flipV="1">
+            <a:off x="482349" y="4472724"/>
+            <a:ext cx="2012908" cy="203968"/>
+          </a:xfrm>
+          <a:prstGeom prst="bentConnector2">
+            <a:avLst/>
+          </a:prstGeom>
+          <a:ln w="31750">
+            <a:solidFill>
+              <a:srgbClr val="1E3A8A"/>
+            </a:solidFill>
+            <a:tailEnd type="triangle"/>
+          </a:ln>
+        </p:spPr>
+        <p:style>
+          <a:lnRef idx="2">
+            <a:schemeClr val="accent1"/>
+          </a:lnRef>
+          <a:fillRef idx="0">
+            <a:schemeClr val="accent1"/>
+          </a:fillRef>
+          <a:effectRef idx="1">
+            <a:schemeClr val="accent1"/>
+          </a:effectRef>
+          <a:fontRef idx="minor">
+            <a:schemeClr val="tx1"/>
+          </a:fontRef>
+        </p:style>
+      </p:cxnSp>
+      <p:cxnSp>
+        <p:nvCxnSpPr>
+          <p:cNvPr id="171" name="연결선: 꺾임 170">
+            <a:extLst>
+              <a:ext uri="{FF2B5EF4-FFF2-40B4-BE49-F238E27FC236}">
+                <a16:creationId xmlns:a16="http://schemas.microsoft.com/office/drawing/2014/main" id="{E0BD66A2-26F2-ED9C-BA17-8E37F9F0FF6A}"/>
+              </a:ext>
+            </a:extLst>
+          </p:cNvPr>
+          <p:cNvCxnSpPr>
+            <a:cxnSpLocks/>
+            <a:stCxn id="139" idx="0"/>
+            <a:endCxn id="131" idx="1"/>
+          </p:cNvCxnSpPr>
+          <p:nvPr/>
+        </p:nvCxnSpPr>
+        <p:spPr>
+          <a:xfrm rot="5400000" flipH="1" flipV="1">
+            <a:off x="501930" y="3951071"/>
+            <a:ext cx="1732147" cy="445568"/>
+          </a:xfrm>
+          <a:prstGeom prst="bentConnector2">
+            <a:avLst/>
+          </a:prstGeom>
+          <a:ln w="31750">
+            <a:solidFill>
+              <a:srgbClr val="1E3A8A"/>
+            </a:solidFill>
+            <a:tailEnd type="triangle"/>
+          </a:ln>
+        </p:spPr>
+        <p:style>
+          <a:lnRef idx="2">
+            <a:schemeClr val="accent1"/>
+          </a:lnRef>
+          <a:fillRef idx="0">
+            <a:schemeClr val="accent1"/>
+          </a:fillRef>
+          <a:effectRef idx="1">
+            <a:schemeClr val="accent1"/>
+          </a:effectRef>
+          <a:fontRef idx="minor">
+            <a:schemeClr val="tx1"/>
+          </a:fontRef>
+        </p:style>
+      </p:cxnSp>
+      <p:cxnSp>
+        <p:nvCxnSpPr>
+          <p:cNvPr id="180" name="연결선: 꺾임 179">
+            <a:extLst>
+              <a:ext uri="{FF2B5EF4-FFF2-40B4-BE49-F238E27FC236}">
+                <a16:creationId xmlns:a16="http://schemas.microsoft.com/office/drawing/2014/main" id="{9E232401-B9BF-453C-0021-C0481D06279D}"/>
+              </a:ext>
+            </a:extLst>
+          </p:cNvPr>
+          <p:cNvCxnSpPr>
+            <a:cxnSpLocks/>
+            <a:stCxn id="148" idx="3"/>
+          </p:cNvCxnSpPr>
+          <p:nvPr/>
+        </p:nvCxnSpPr>
+        <p:spPr>
+          <a:xfrm flipV="1">
+            <a:off x="4138027" y="2325529"/>
+            <a:ext cx="1221034" cy="280052"/>
+          </a:xfrm>
+          <a:prstGeom prst="bentConnector3">
+            <a:avLst>
+              <a:gd name="adj1" fmla="val 50000"/>
+            </a:avLst>
+          </a:prstGeom>
+          <a:ln w="31750">
+            <a:solidFill>
+              <a:srgbClr val="1E3A8A"/>
+            </a:solidFill>
+            <a:tailEnd type="triangle"/>
+          </a:ln>
+        </p:spPr>
+        <p:style>
+          <a:lnRef idx="2">
+            <a:schemeClr val="accent1"/>
+          </a:lnRef>
+          <a:fillRef idx="0">
+            <a:schemeClr val="accent1"/>
+          </a:fillRef>
+          <a:effectRef idx="1">
+            <a:schemeClr val="accent1"/>
+          </a:effectRef>
+          <a:fontRef idx="minor">
+            <a:schemeClr val="tx1"/>
+          </a:fontRef>
+        </p:style>
+      </p:cxnSp>
+      <p:sp>
+        <p:nvSpPr>
+          <p:cNvPr id="190" name="TextBox 189">
+            <a:extLst>
+              <a:ext uri="{FF2B5EF4-FFF2-40B4-BE49-F238E27FC236}">
+                <a16:creationId xmlns:a16="http://schemas.microsoft.com/office/drawing/2014/main" id="{65479CE5-4C67-E11F-B5DC-3B61A518C514}"/>
+              </a:ext>
+            </a:extLst>
+          </p:cNvPr>
+          <p:cNvSpPr txBox="1"/>
+          <p:nvPr/>
+        </p:nvSpPr>
+        <p:spPr>
+          <a:xfrm>
+            <a:off x="1655132" y="2261712"/>
+            <a:ext cx="929800" cy="230832"/>
+          </a:xfrm>
+          <a:prstGeom prst="rect">
+            <a:avLst/>
+          </a:prstGeom>
+          <a:noFill/>
+        </p:spPr>
+        <p:txBody>
+          <a:bodyPr wrap="square">
+            <a:spAutoFit/>
+          </a:bodyPr>
+          <a:lstStyle/>
+          <a:p>
+            <a:pPr algn="ctr"/>
+            <a:r>
+              <a:rPr lang="en-US" altLang="ko-KR" sz="900" b="1">
+                <a:solidFill>
+                  <a:srgbClr val="B91C1C"/>
+                </a:solidFill>
+                <a:latin typeface="Malgun Gothic" panose="020B0503020000020004" pitchFamily="50" charset="-127"/>
+              </a:rPr>
+              <a:t>tick_gen</a:t>
+            </a:r>
+            <a:endParaRPr lang="de-DE" altLang="ko-KR" sz="900" b="1">
+              <a:solidFill>
+                <a:srgbClr val="B91C1C"/>
+              </a:solidFill>
+              <a:latin typeface="Malgun Gothic" panose="020B0503020000020004" pitchFamily="50" charset="-127"/>
+            </a:endParaRPr>
+          </a:p>
+        </p:txBody>
+      </p:sp>
+      <p:sp>
+        <p:nvSpPr>
+          <p:cNvPr id="193" name="TextBox 192">
+            <a:extLst>
+              <a:ext uri="{FF2B5EF4-FFF2-40B4-BE49-F238E27FC236}">
+                <a16:creationId xmlns:a16="http://schemas.microsoft.com/office/drawing/2014/main" id="{68675611-0621-26E7-CA8D-AB4699D069A4}"/>
+              </a:ext>
+            </a:extLst>
+          </p:cNvPr>
+          <p:cNvSpPr txBox="1"/>
+          <p:nvPr/>
+        </p:nvSpPr>
+        <p:spPr>
+          <a:xfrm>
+            <a:off x="3190447" y="2284572"/>
+            <a:ext cx="759664" cy="230832"/>
+          </a:xfrm>
+          <a:prstGeom prst="rect">
+            <a:avLst/>
+          </a:prstGeom>
+          <a:noFill/>
+        </p:spPr>
+        <p:txBody>
+          <a:bodyPr wrap="square">
+            <a:spAutoFit/>
+          </a:bodyPr>
+          <a:lstStyle/>
+          <a:p>
+            <a:pPr algn="ctr"/>
+            <a:r>
+              <a:rPr lang="en-US" altLang="ko-KR" sz="900" b="1">
+                <a:solidFill>
+                  <a:srgbClr val="B91C1C"/>
+                </a:solidFill>
+                <a:latin typeface="Malgun Gothic" panose="020B0503020000020004" pitchFamily="50" charset="-127"/>
+              </a:rPr>
+              <a:t>counter</a:t>
+            </a:r>
+            <a:endParaRPr lang="de-DE" altLang="ko-KR" sz="900" b="1">
+              <a:solidFill>
+                <a:srgbClr val="B91C1C"/>
+              </a:solidFill>
+              <a:latin typeface="Malgun Gothic" panose="020B0503020000020004" pitchFamily="50" charset="-127"/>
+            </a:endParaRPr>
+          </a:p>
+        </p:txBody>
+      </p:sp>
+      <p:cxnSp>
+        <p:nvCxnSpPr>
+          <p:cNvPr id="201" name="연결선: 꺾임 200">
+            <a:extLst>
+              <a:ext uri="{FF2B5EF4-FFF2-40B4-BE49-F238E27FC236}">
+                <a16:creationId xmlns:a16="http://schemas.microsoft.com/office/drawing/2014/main" id="{307291B5-5384-5A02-25EF-65F95AF60AE3}"/>
+              </a:ext>
+            </a:extLst>
+          </p:cNvPr>
+          <p:cNvCxnSpPr>
+            <a:cxnSpLocks/>
+          </p:cNvCxnSpPr>
+          <p:nvPr/>
+        </p:nvCxnSpPr>
+        <p:spPr>
+          <a:xfrm flipV="1">
+            <a:off x="1386818" y="3749502"/>
+            <a:ext cx="1693575" cy="393268"/>
+          </a:xfrm>
+          <a:prstGeom prst="bentConnector3">
+            <a:avLst>
+              <a:gd name="adj1" fmla="val 50000"/>
+            </a:avLst>
+          </a:prstGeom>
+          <a:ln w="31750">
+            <a:solidFill>
+              <a:srgbClr val="1E3A8A"/>
+            </a:solidFill>
+            <a:tailEnd type="triangle"/>
+          </a:ln>
+        </p:spPr>
+        <p:style>
+          <a:lnRef idx="2">
+            <a:schemeClr val="accent1"/>
+          </a:lnRef>
+          <a:fillRef idx="0">
+            <a:schemeClr val="accent1"/>
+          </a:fillRef>
+          <a:effectRef idx="1">
+            <a:schemeClr val="accent1"/>
+          </a:effectRef>
+          <a:fontRef idx="minor">
+            <a:schemeClr val="tx1"/>
+          </a:fontRef>
+        </p:style>
+      </p:cxnSp>
+      <p:sp>
+        <p:nvSpPr>
+          <p:cNvPr id="209" name="lib_dec_lbl_i_sel[1:0]">
+            <a:extLst>
+              <a:ext uri="{FF2B5EF4-FFF2-40B4-BE49-F238E27FC236}">
+                <a16:creationId xmlns:a16="http://schemas.microsoft.com/office/drawing/2014/main" id="{51370A2B-116A-2FB1-3F7C-FF02BEF16A65}"/>
+              </a:ext>
+            </a:extLst>
+          </p:cNvPr>
+          <p:cNvSpPr txBox="1"/>
+          <p:nvPr/>
+        </p:nvSpPr>
+        <p:spPr>
+          <a:xfrm>
+            <a:off x="3245814" y="3670566"/>
+            <a:ext cx="1016000" cy="276999"/>
+          </a:xfrm>
+          <a:prstGeom prst="rect">
+            <a:avLst/>
+          </a:prstGeom>
+          <a:noFill/>
+        </p:spPr>
+        <p:txBody>
+          <a:bodyPr vert="horz" wrap="square" lIns="0" tIns="0" rIns="0" bIns="0" rtlCol="0">
+            <a:noAutofit/>
+          </a:bodyPr>
+          <a:lstStyle/>
+          <a:p>
+            <a:r>
+              <a:rPr lang="en-US" altLang="ko-KR" sz="800" b="1">
+                <a:solidFill>
+                  <a:srgbClr val="1F2937"/>
+                </a:solidFill>
+                <a:latin typeface="Malgun Gothic" panose="020B0503020000020004" pitchFamily="50" charset="-127"/>
+              </a:rPr>
+              <a:t>i_reset</a:t>
+            </a:r>
+            <a:endParaRPr lang="ko-KR" altLang="en-US" sz="800" b="1">
+              <a:solidFill>
+                <a:srgbClr val="1F2937"/>
+              </a:solidFill>
+              <a:latin typeface="Malgun Gothic" panose="020B0503020000020004" pitchFamily="50" charset="-127"/>
+            </a:endParaRPr>
+          </a:p>
+        </p:txBody>
+      </p:sp>
+      <p:sp>
+        <p:nvSpPr>
+          <p:cNvPr id="210" name="TextBox 209">
+            <a:extLst>
+              <a:ext uri="{FF2B5EF4-FFF2-40B4-BE49-F238E27FC236}">
+                <a16:creationId xmlns:a16="http://schemas.microsoft.com/office/drawing/2014/main" id="{5471706D-C6C3-9655-7041-67EB0BED7397}"/>
+              </a:ext>
+            </a:extLst>
+          </p:cNvPr>
+          <p:cNvSpPr txBox="1"/>
+          <p:nvPr/>
+        </p:nvSpPr>
+        <p:spPr>
+          <a:xfrm>
+            <a:off x="3435908" y="130962"/>
+            <a:ext cx="8585825" cy="523220"/>
+          </a:xfrm>
+          <a:prstGeom prst="rect">
+            <a:avLst/>
+          </a:prstGeom>
+          <a:noFill/>
+        </p:spPr>
+        <p:txBody>
+          <a:bodyPr wrap="square" rtlCol="0">
+            <a:spAutoFit/>
+          </a:bodyPr>
+          <a:lstStyle/>
+          <a:p>
+            <a:r>
+              <a:rPr lang="ko-KR" altLang="en-US" sz="1400"/>
+              <a:t>목표 </a:t>
+            </a:r>
+            <a:r>
+              <a:rPr lang="en-US" altLang="ko-KR" sz="1400"/>
+              <a:t>: </a:t>
+            </a:r>
+            <a:r>
+              <a:rPr lang="ko-KR" altLang="en-US" sz="1400"/>
+              <a:t>보드 클럭 자원을 온전히 이용하여 </a:t>
+            </a:r>
+            <a:r>
+              <a:rPr lang="en-US" altLang="ko-KR" sz="1400"/>
+              <a:t>Tick</a:t>
+            </a:r>
+            <a:r>
+              <a:rPr lang="ko-KR" altLang="en-US" sz="1400"/>
+              <a:t>을 만들고 보드에서 </a:t>
+            </a:r>
+            <a:r>
+              <a:rPr lang="en-US" altLang="ko-KR" sz="1400"/>
+              <a:t>9999 </a:t>
+            </a:r>
+            <a:r>
+              <a:rPr lang="ko-KR" altLang="en-US" sz="1400"/>
+              <a:t>까지 출력 </a:t>
+            </a:r>
+            <a:r>
+              <a:rPr lang="en-US" altLang="ko-KR" sz="1400"/>
+              <a:t>(  </a:t>
+            </a:r>
+            <a:r>
+              <a:rPr lang="ko-KR" altLang="en-US" sz="1400"/>
+              <a:t>더 추가</a:t>
+            </a:r>
+            <a:r>
+              <a:rPr lang="en-US" altLang="ko-KR" sz="1400"/>
+              <a:t>)</a:t>
+            </a:r>
+          </a:p>
+          <a:p>
+            <a:r>
+              <a:rPr lang="ko-KR" altLang="en-US" sz="1400"/>
+              <a:t>조합회로</a:t>
+            </a:r>
+            <a:r>
+              <a:rPr lang="en-US" altLang="ko-KR" sz="1400"/>
+              <a:t>/ </a:t>
+            </a:r>
+            <a:r>
+              <a:rPr lang="ko-KR" altLang="en-US" sz="1400"/>
+              <a:t>순차회로  구별 할것</a:t>
+            </a:r>
+            <a:r>
+              <a:rPr lang="en-US" altLang="ko-KR" sz="1400"/>
+              <a:t> – </a:t>
+            </a:r>
+            <a:r>
+              <a:rPr lang="ko-KR" altLang="en-US" sz="1400"/>
+              <a:t>색깔을 달리하면 됨</a:t>
+            </a:r>
+            <a:r>
+              <a:rPr lang="en-US" altLang="ko-KR" sz="1400"/>
+              <a:t>. </a:t>
+            </a:r>
+            <a:r>
+              <a:rPr lang="ko-KR" altLang="en-US" sz="1400"/>
+              <a:t>제시된 블럭다이어그램 재구성 </a:t>
+            </a:r>
           </a:p>
         </p:txBody>
       </p:sp>
     </p:spTree>
     <p:extLst>
       <p:ext uri="{BB962C8B-B14F-4D97-AF65-F5344CB8AC3E}">
-        <p14:creationId xmlns:p14="http://schemas.microsoft.com/office/powerpoint/2010/main" val="3921404868"/>
+        <p14:creationId xmlns:p14="http://schemas.microsoft.com/office/powerpoint/2010/main" val="3837895244"/>
       </p:ext>
     </p:extLst>
   </p:cSld>
